--- a/docs/manuscript/figures.pptx
+++ b/docs/manuscript/figures.pptx
@@ -5,13 +5,16 @@
     <p:sldMasterId id="2147483660" r:id="rId1"/>
   </p:sldMasterIdLst>
   <p:notesMasterIdLst>
-    <p:notesMasterId r:id="rId6"/>
+    <p:notesMasterId r:id="rId9"/>
   </p:notesMasterIdLst>
   <p:sldIdLst>
     <p:sldId id="256" r:id="rId2"/>
     <p:sldId id="259" r:id="rId3"/>
-    <p:sldId id="257" r:id="rId4"/>
-    <p:sldId id="258" r:id="rId5"/>
+    <p:sldId id="260" r:id="rId4"/>
+    <p:sldId id="263" r:id="rId5"/>
+    <p:sldId id="261" r:id="rId6"/>
+    <p:sldId id="258" r:id="rId7"/>
+    <p:sldId id="262" r:id="rId8"/>
   </p:sldIdLst>
   <p:sldSz cx="29260800" cy="16459200"/>
   <p:notesSz cx="6858000" cy="9144000"/>
@@ -200,7 +203,7 @@
           <a:p>
             <a:fld id="{995913B7-5510-6E41-B14E-AE7D08143742}" type="datetimeFigureOut">
               <a:rPr lang="en-US" smtClean="0"/>
-              <a:t>2/13/26</a:t>
+              <a:t>3/23/26</a:t>
             </a:fld>
             <a:endParaRPr lang="en-US"/>
           </a:p>
@@ -472,6 +475,114 @@
   <p:cSld>
     <p:spTree>
       <p:nvGrpSpPr>
+        <p:cNvPr id="1" name="">
+          <a:extLst>
+            <a:ext uri="{FF2B5EF4-FFF2-40B4-BE49-F238E27FC236}">
+              <a16:creationId xmlns:a16="http://schemas.microsoft.com/office/drawing/2014/main" id="{F44B3AE6-7A06-0A80-A273-AA0EC319BA03}"/>
+            </a:ext>
+          </a:extLst>
+        </p:cNvPr>
+        <p:cNvGrpSpPr/>
+        <p:nvPr/>
+      </p:nvGrpSpPr>
+      <p:grpSpPr>
+        <a:xfrm>
+          <a:off x="0" y="0"/>
+          <a:ext cx="0" cy="0"/>
+          <a:chOff x="0" y="0"/>
+          <a:chExt cx="0" cy="0"/>
+        </a:xfrm>
+      </p:grpSpPr>
+      <p:sp>
+        <p:nvSpPr>
+          <p:cNvPr id="2" name="Slide Image Placeholder 1">
+            <a:extLst>
+              <a:ext uri="{FF2B5EF4-FFF2-40B4-BE49-F238E27FC236}">
+                <a16:creationId xmlns:a16="http://schemas.microsoft.com/office/drawing/2014/main" id="{1C9DDCA7-66C6-D4B0-1007-9BFA9A12727C}"/>
+              </a:ext>
+            </a:extLst>
+          </p:cNvPr>
+          <p:cNvSpPr>
+            <a:spLocks noGrp="1" noRot="1" noChangeAspect="1"/>
+          </p:cNvSpPr>
+          <p:nvPr>
+            <p:ph type="sldImg"/>
+          </p:nvPr>
+        </p:nvSpPr>
+        <p:spPr/>
+      </p:sp>
+      <p:sp>
+        <p:nvSpPr>
+          <p:cNvPr id="3" name="Notes Placeholder 2">
+            <a:extLst>
+              <a:ext uri="{FF2B5EF4-FFF2-40B4-BE49-F238E27FC236}">
+                <a16:creationId xmlns:a16="http://schemas.microsoft.com/office/drawing/2014/main" id="{6C82E8D5-6F93-EB7A-167B-125ED441FC3F}"/>
+              </a:ext>
+            </a:extLst>
+          </p:cNvPr>
+          <p:cNvSpPr>
+            <a:spLocks noGrp="1"/>
+          </p:cNvSpPr>
+          <p:nvPr>
+            <p:ph type="body" idx="1"/>
+          </p:nvPr>
+        </p:nvSpPr>
+        <p:spPr/>
+        <p:txBody>
+          <a:bodyPr/>
+          <a:lstStyle/>
+          <a:p>
+            <a:endParaRPr lang="en-US" dirty="0"/>
+          </a:p>
+        </p:txBody>
+      </p:sp>
+      <p:sp>
+        <p:nvSpPr>
+          <p:cNvPr id="4" name="Slide Number Placeholder 3">
+            <a:extLst>
+              <a:ext uri="{FF2B5EF4-FFF2-40B4-BE49-F238E27FC236}">
+                <a16:creationId xmlns:a16="http://schemas.microsoft.com/office/drawing/2014/main" id="{6DF382CD-3841-F15C-68C9-12479EA8FA9B}"/>
+              </a:ext>
+            </a:extLst>
+          </p:cNvPr>
+          <p:cNvSpPr>
+            <a:spLocks noGrp="1"/>
+          </p:cNvSpPr>
+          <p:nvPr>
+            <p:ph type="sldNum" sz="quarter" idx="5"/>
+          </p:nvPr>
+        </p:nvSpPr>
+        <p:spPr/>
+        <p:txBody>
+          <a:bodyPr/>
+          <a:lstStyle/>
+          <a:p>
+            <a:fld id="{B9489DBF-ACC3-F643-BD5F-3B14103177E5}" type="slidenum">
+              <a:rPr lang="en-US" smtClean="0"/>
+              <a:t>3</a:t>
+            </a:fld>
+            <a:endParaRPr lang="en-US"/>
+          </a:p>
+        </p:txBody>
+      </p:sp>
+    </p:spTree>
+    <p:extLst>
+      <p:ext uri="{BB962C8B-B14F-4D97-AF65-F5344CB8AC3E}">
+        <p14:creationId xmlns:p14="http://schemas.microsoft.com/office/powerpoint/2010/main" val="3415473730"/>
+      </p:ext>
+    </p:extLst>
+  </p:cSld>
+  <p:clrMapOvr>
+    <a:masterClrMapping/>
+  </p:clrMapOvr>
+</p:notes>
+</file>
+
+<file path=ppt/notesSlides/notesSlide2.xml><?xml version="1.0" encoding="utf-8"?>
+<p:notes xmlns:a="http://schemas.openxmlformats.org/drawingml/2006/main" xmlns:r="http://schemas.openxmlformats.org/officeDocument/2006/relationships" xmlns:p="http://schemas.openxmlformats.org/presentationml/2006/main">
+  <p:cSld>
+    <p:spTree>
+      <p:nvGrpSpPr>
         <p:cNvPr id="1" name=""/>
         <p:cNvGrpSpPr/>
         <p:nvPr/>
@@ -532,7 +643,7 @@
           <a:p>
             <a:fld id="{B9489DBF-ACC3-F643-BD5F-3B14103177E5}" type="slidenum">
               <a:rPr lang="en-US" smtClean="0"/>
-              <a:t>3</a:t>
+              <a:t>7</a:t>
             </a:fld>
             <a:endParaRPr lang="en-US"/>
           </a:p>
@@ -541,7 +652,7 @@
     </p:spTree>
     <p:extLst>
       <p:ext uri="{BB962C8B-B14F-4D97-AF65-F5344CB8AC3E}">
-        <p14:creationId xmlns:p14="http://schemas.microsoft.com/office/powerpoint/2010/main" val="3463497325"/>
+        <p14:creationId xmlns:p14="http://schemas.microsoft.com/office/powerpoint/2010/main" val="3789482550"/>
       </p:ext>
     </p:extLst>
   </p:cSld>
@@ -682,7 +793,7 @@
           <a:p>
             <a:fld id="{4929390D-1E74-874C-A776-978F14B33A7C}" type="datetimeFigureOut">
               <a:rPr lang="en-US" smtClean="0"/>
-              <a:t>2/13/26</a:t>
+              <a:t>3/23/26</a:t>
             </a:fld>
             <a:endParaRPr lang="en-US"/>
           </a:p>
@@ -852,7 +963,7 @@
           <a:p>
             <a:fld id="{4929390D-1E74-874C-A776-978F14B33A7C}" type="datetimeFigureOut">
               <a:rPr lang="en-US" smtClean="0"/>
-              <a:t>2/13/26</a:t>
+              <a:t>3/23/26</a:t>
             </a:fld>
             <a:endParaRPr lang="en-US"/>
           </a:p>
@@ -1032,7 +1143,7 @@
           <a:p>
             <a:fld id="{4929390D-1E74-874C-A776-978F14B33A7C}" type="datetimeFigureOut">
               <a:rPr lang="en-US" smtClean="0"/>
-              <a:t>2/13/26</a:t>
+              <a:t>3/23/26</a:t>
             </a:fld>
             <a:endParaRPr lang="en-US"/>
           </a:p>
@@ -1202,7 +1313,7 @@
           <a:p>
             <a:fld id="{4929390D-1E74-874C-A776-978F14B33A7C}" type="datetimeFigureOut">
               <a:rPr lang="en-US" smtClean="0"/>
-              <a:t>2/13/26</a:t>
+              <a:t>3/23/26</a:t>
             </a:fld>
             <a:endParaRPr lang="en-US"/>
           </a:p>
@@ -1448,7 +1559,7 @@
           <a:p>
             <a:fld id="{4929390D-1E74-874C-A776-978F14B33A7C}" type="datetimeFigureOut">
               <a:rPr lang="en-US" smtClean="0"/>
-              <a:t>2/13/26</a:t>
+              <a:t>3/23/26</a:t>
             </a:fld>
             <a:endParaRPr lang="en-US"/>
           </a:p>
@@ -1680,7 +1791,7 @@
           <a:p>
             <a:fld id="{4929390D-1E74-874C-A776-978F14B33A7C}" type="datetimeFigureOut">
               <a:rPr lang="en-US" smtClean="0"/>
-              <a:t>2/13/26</a:t>
+              <a:t>3/23/26</a:t>
             </a:fld>
             <a:endParaRPr lang="en-US"/>
           </a:p>
@@ -2047,7 +2158,7 @@
           <a:p>
             <a:fld id="{4929390D-1E74-874C-A776-978F14B33A7C}" type="datetimeFigureOut">
               <a:rPr lang="en-US" smtClean="0"/>
-              <a:t>2/13/26</a:t>
+              <a:t>3/23/26</a:t>
             </a:fld>
             <a:endParaRPr lang="en-US"/>
           </a:p>
@@ -2165,7 +2276,7 @@
           <a:p>
             <a:fld id="{4929390D-1E74-874C-A776-978F14B33A7C}" type="datetimeFigureOut">
               <a:rPr lang="en-US" smtClean="0"/>
-              <a:t>2/13/26</a:t>
+              <a:t>3/23/26</a:t>
             </a:fld>
             <a:endParaRPr lang="en-US"/>
           </a:p>
@@ -2260,7 +2371,7 @@
           <a:p>
             <a:fld id="{4929390D-1E74-874C-A776-978F14B33A7C}" type="datetimeFigureOut">
               <a:rPr lang="en-US" smtClean="0"/>
-              <a:t>2/13/26</a:t>
+              <a:t>3/23/26</a:t>
             </a:fld>
             <a:endParaRPr lang="en-US"/>
           </a:p>
@@ -2537,7 +2648,7 @@
           <a:p>
             <a:fld id="{4929390D-1E74-874C-A776-978F14B33A7C}" type="datetimeFigureOut">
               <a:rPr lang="en-US" smtClean="0"/>
-              <a:t>2/13/26</a:t>
+              <a:t>3/23/26</a:t>
             </a:fld>
             <a:endParaRPr lang="en-US"/>
           </a:p>
@@ -2794,7 +2905,7 @@
           <a:p>
             <a:fld id="{4929390D-1E74-874C-A776-978F14B33A7C}" type="datetimeFigureOut">
               <a:rPr lang="en-US" smtClean="0"/>
-              <a:t>2/13/26</a:t>
+              <a:t>3/23/26</a:t>
             </a:fld>
             <a:endParaRPr lang="en-US"/>
           </a:p>
@@ -3007,7 +3118,7 @@
           <a:p>
             <a:fld id="{4929390D-1E74-874C-A776-978F14B33A7C}" type="datetimeFigureOut">
               <a:rPr lang="en-US" smtClean="0"/>
-              <a:t>2/13/26</a:t>
+              <a:t>3/23/26</a:t>
             </a:fld>
             <a:endParaRPr lang="en-US"/>
           </a:p>
@@ -3736,7 +3847,13 @@
   <p:cSld>
     <p:spTree>
       <p:nvGrpSpPr>
-        <p:cNvPr id="1" name=""/>
+        <p:cNvPr id="1" name="">
+          <a:extLst>
+            <a:ext uri="{FF2B5EF4-FFF2-40B4-BE49-F238E27FC236}">
+              <a16:creationId xmlns:a16="http://schemas.microsoft.com/office/drawing/2014/main" id="{37607679-D8FE-91B0-23EA-8296730600B0}"/>
+            </a:ext>
+          </a:extLst>
+        </p:cNvPr>
         <p:cNvGrpSpPr/>
         <p:nvPr/>
       </p:nvGrpSpPr>
@@ -3753,7 +3870,7 @@
           <p:cNvPr id="4" name="Rectangle 3">
             <a:extLst>
               <a:ext uri="{FF2B5EF4-FFF2-40B4-BE49-F238E27FC236}">
-                <a16:creationId xmlns:a16="http://schemas.microsoft.com/office/drawing/2014/main" id="{6C5CCC2D-4E5B-B526-6366-1B61B734E50C}"/>
+                <a16:creationId xmlns:a16="http://schemas.microsoft.com/office/drawing/2014/main" id="{6B02646C-1806-2AD6-FFCE-DC2CC68DDCB9}"/>
               </a:ext>
             </a:extLst>
           </p:cNvPr>
@@ -3769,6 +3886,9 @@
             <a:avLst/>
           </a:prstGeom>
           <a:noFill/>
+          <a:ln>
+            <a:noFill/>
+          </a:ln>
         </p:spPr>
         <p:style>
           <a:lnRef idx="2">
@@ -3797,7 +3917,7 @@
                   <a:schemeClr val="tx1"/>
                 </a:solidFill>
               </a:rPr>
-              <a:t>Topic (with optional context)</a:t>
+              <a:t>Query (with optional context)</a:t>
             </a:r>
             <a:endParaRPr lang="en-US" sz="4200" dirty="0">
               <a:solidFill>
@@ -3823,7 +3943,7 @@
           <p:cNvPr id="5" name="Rectangle 4">
             <a:extLst>
               <a:ext uri="{FF2B5EF4-FFF2-40B4-BE49-F238E27FC236}">
-                <a16:creationId xmlns:a16="http://schemas.microsoft.com/office/drawing/2014/main" id="{024FC3A9-8CE1-543B-F8EE-6F85B90F0E1D}"/>
+                <a16:creationId xmlns:a16="http://schemas.microsoft.com/office/drawing/2014/main" id="{F5AD8569-1D57-CF44-2E0E-A4F374D3FF09}"/>
               </a:ext>
             </a:extLst>
           </p:cNvPr>
@@ -3839,6 +3959,9 @@
             <a:avLst/>
           </a:prstGeom>
           <a:noFill/>
+          <a:ln>
+            <a:noFill/>
+          </a:ln>
         </p:spPr>
         <p:style>
           <a:lnRef idx="2">
@@ -3867,7 +3990,7 @@
                   <a:schemeClr val="tx1"/>
                 </a:solidFill>
               </a:rPr>
-              <a:t>Outline</a:t>
+              <a:t>Structured Outline</a:t>
             </a:r>
             <a:endParaRPr lang="en-US" sz="4200" dirty="0">
               <a:solidFill>
@@ -3893,7 +4016,7 @@
           <p:cNvPr id="16" name="Right Arrow 15">
             <a:extLst>
               <a:ext uri="{FF2B5EF4-FFF2-40B4-BE49-F238E27FC236}">
-                <a16:creationId xmlns:a16="http://schemas.microsoft.com/office/drawing/2014/main" id="{54AD47E4-BA62-2426-7B7B-7AA7AF1A5A04}"/>
+                <a16:creationId xmlns:a16="http://schemas.microsoft.com/office/drawing/2014/main" id="{5847C8CD-B2E4-1F81-0C94-4AF411CD804C}"/>
               </a:ext>
             </a:extLst>
           </p:cNvPr>
@@ -3944,7 +4067,7 @@
           <p:cNvPr id="17" name="TextBox 16">
             <a:extLst>
               <a:ext uri="{FF2B5EF4-FFF2-40B4-BE49-F238E27FC236}">
-                <a16:creationId xmlns:a16="http://schemas.microsoft.com/office/drawing/2014/main" id="{D72CAAD6-5FCE-DC17-A034-BB627AC7E2E3}"/>
+                <a16:creationId xmlns:a16="http://schemas.microsoft.com/office/drawing/2014/main" id="{C5F5F537-C241-355B-ABD2-D23AC1B27F5C}"/>
               </a:ext>
             </a:extLst>
           </p:cNvPr>
@@ -3953,7 +4076,7 @@
         </p:nvSpPr>
         <p:spPr>
           <a:xfrm>
-            <a:off x="14188086" y="461383"/>
+            <a:off x="14188086" y="572893"/>
             <a:ext cx="9352404" cy="738664"/>
           </a:xfrm>
           <a:prstGeom prst="rect">
@@ -3980,7 +4103,7 @@
           <p:cNvPr id="18" name="Rectangle 17">
             <a:extLst>
               <a:ext uri="{FF2B5EF4-FFF2-40B4-BE49-F238E27FC236}">
-                <a16:creationId xmlns:a16="http://schemas.microsoft.com/office/drawing/2014/main" id="{81967804-D456-C6C9-B685-A246EDFE549F}"/>
+                <a16:creationId xmlns:a16="http://schemas.microsoft.com/office/drawing/2014/main" id="{42F58ACA-9A5B-2199-8CBD-54DD5B58A33B}"/>
               </a:ext>
             </a:extLst>
           </p:cNvPr>
@@ -4025,42 +4148,12 @@
           </a:p>
         </p:txBody>
       </p:sp>
-      <p:pic>
-        <p:nvPicPr>
-          <p:cNvPr id="19" name="Picture 18">
-            <a:extLst>
-              <a:ext uri="{FF2B5EF4-FFF2-40B4-BE49-F238E27FC236}">
-                <a16:creationId xmlns:a16="http://schemas.microsoft.com/office/drawing/2014/main" id="{64C0055D-AD76-8631-836F-AC3D5652B0C1}"/>
-              </a:ext>
-            </a:extLst>
-          </p:cNvPr>
-          <p:cNvPicPr>
-            <a:picLocks noChangeAspect="1"/>
-          </p:cNvPicPr>
-          <p:nvPr/>
-        </p:nvPicPr>
-        <p:blipFill>
-          <a:blip r:embed="rId3"/>
-          <a:stretch>
-            <a:fillRect/>
-          </a:stretch>
-        </p:blipFill>
-        <p:spPr>
-          <a:xfrm>
-            <a:off x="8496554" y="4961530"/>
-            <a:ext cx="3477857" cy="5951796"/>
-          </a:xfrm>
-          <a:prstGeom prst="rect">
-            <a:avLst/>
-          </a:prstGeom>
-        </p:spPr>
-      </p:pic>
       <p:sp>
         <p:nvSpPr>
           <p:cNvPr id="23" name="Rectangle 22">
             <a:extLst>
               <a:ext uri="{FF2B5EF4-FFF2-40B4-BE49-F238E27FC236}">
-                <a16:creationId xmlns:a16="http://schemas.microsoft.com/office/drawing/2014/main" id="{E015D0F9-0A98-378B-BBE0-59842162834D}"/>
+                <a16:creationId xmlns:a16="http://schemas.microsoft.com/office/drawing/2014/main" id="{5A9544A1-18B6-5B03-5E90-6D3968BBCFAB}"/>
               </a:ext>
             </a:extLst>
           </p:cNvPr>
@@ -4069,8 +4162,8 @@
         </p:nvSpPr>
         <p:spPr>
           <a:xfrm>
-            <a:off x="20694028" y="1662930"/>
-            <a:ext cx="7527852" cy="3026664"/>
+            <a:off x="20463588" y="1662930"/>
+            <a:ext cx="8107664" cy="14065264"/>
           </a:xfrm>
           <a:prstGeom prst="rect">
             <a:avLst/>
@@ -4126,7 +4219,7 @@
           <p:cNvPr id="24" name="Rectangle 23">
             <a:extLst>
               <a:ext uri="{FF2B5EF4-FFF2-40B4-BE49-F238E27FC236}">
-                <a16:creationId xmlns:a16="http://schemas.microsoft.com/office/drawing/2014/main" id="{6D9180A1-5D81-3413-D37D-CDD60BD46490}"/>
+                <a16:creationId xmlns:a16="http://schemas.microsoft.com/office/drawing/2014/main" id="{4B541603-6F86-411F-BFE1-6852BAECA9D9}"/>
               </a:ext>
             </a:extLst>
           </p:cNvPr>
@@ -4135,8 +4228,8 @@
         </p:nvSpPr>
         <p:spPr>
           <a:xfrm>
-            <a:off x="16392232" y="1662930"/>
-            <a:ext cx="3836028" cy="3028524"/>
+            <a:off x="16280722" y="1662929"/>
+            <a:ext cx="3836028" cy="14065265"/>
           </a:xfrm>
           <a:prstGeom prst="rect">
             <a:avLst/>
@@ -4191,7 +4284,7 @@
           <p:cNvPr id="25" name="Rectangle 24">
             <a:extLst>
               <a:ext uri="{FF2B5EF4-FFF2-40B4-BE49-F238E27FC236}">
-                <a16:creationId xmlns:a16="http://schemas.microsoft.com/office/drawing/2014/main" id="{1F0CEB64-F5B9-EF26-746E-7F527954E51F}"/>
+                <a16:creationId xmlns:a16="http://schemas.microsoft.com/office/drawing/2014/main" id="{644100AB-8080-6603-0A1F-459CD69E7378}"/>
               </a:ext>
             </a:extLst>
           </p:cNvPr>
@@ -4200,8 +4293,8 @@
         </p:nvSpPr>
         <p:spPr>
           <a:xfrm>
-            <a:off x="12209366" y="1662930"/>
-            <a:ext cx="3836028" cy="3028524"/>
+            <a:off x="12120158" y="1662930"/>
+            <a:ext cx="3836028" cy="14065266"/>
           </a:xfrm>
           <a:prstGeom prst="rect">
             <a:avLst/>
@@ -4256,7 +4349,7 @@
           <p:cNvPr id="26" name="Rectangle 25">
             <a:extLst>
               <a:ext uri="{FF2B5EF4-FFF2-40B4-BE49-F238E27FC236}">
-                <a16:creationId xmlns:a16="http://schemas.microsoft.com/office/drawing/2014/main" id="{E29D0EDE-67E1-65F8-D2DF-777F63B11C9E}"/>
+                <a16:creationId xmlns:a16="http://schemas.microsoft.com/office/drawing/2014/main" id="{04B85DB9-D27E-5061-A82E-4FD91D1FC163}"/>
               </a:ext>
             </a:extLst>
           </p:cNvPr>
@@ -4266,7 +4359,7 @@
         <p:spPr>
           <a:xfrm>
             <a:off x="8638531" y="1662930"/>
-            <a:ext cx="3193903" cy="3028524"/>
+            <a:ext cx="3193903" cy="14065266"/>
           </a:xfrm>
           <a:prstGeom prst="rect">
             <a:avLst/>
@@ -4321,7 +4414,7 @@
           <p:cNvPr id="27" name="Right Arrow 26">
             <a:extLst>
               <a:ext uri="{FF2B5EF4-FFF2-40B4-BE49-F238E27FC236}">
-                <a16:creationId xmlns:a16="http://schemas.microsoft.com/office/drawing/2014/main" id="{26E265BF-2B70-114C-CA7F-3C6A69544F8E}"/>
+                <a16:creationId xmlns:a16="http://schemas.microsoft.com/office/drawing/2014/main" id="{6592C9E0-F76D-FD10-5997-84B431BE108C}"/>
               </a:ext>
             </a:extLst>
           </p:cNvPr>
@@ -4372,7 +4465,7 @@
           <p:cNvPr id="28" name="TextBox 27">
             <a:extLst>
               <a:ext uri="{FF2B5EF4-FFF2-40B4-BE49-F238E27FC236}">
-                <a16:creationId xmlns:a16="http://schemas.microsoft.com/office/drawing/2014/main" id="{E69AA646-4F16-C10B-AFC6-8914DDE70B3E}"/>
+                <a16:creationId xmlns:a16="http://schemas.microsoft.com/office/drawing/2014/main" id="{8A3ADD68-ABF0-EA95-99A9-39686F102038}"/>
               </a:ext>
             </a:extLst>
           </p:cNvPr>
@@ -4408,7 +4501,7 @@
           <p:cNvPr id="29" name="TextBox 28">
             <a:extLst>
               <a:ext uri="{FF2B5EF4-FFF2-40B4-BE49-F238E27FC236}">
-                <a16:creationId xmlns:a16="http://schemas.microsoft.com/office/drawing/2014/main" id="{69812F75-F3A2-2B41-B621-153B55054152}"/>
+                <a16:creationId xmlns:a16="http://schemas.microsoft.com/office/drawing/2014/main" id="{75B3EF21-282C-E9C6-870E-2EC3340A0F3C}"/>
               </a:ext>
             </a:extLst>
           </p:cNvPr>
@@ -4417,7 +4510,7 @@
         </p:nvSpPr>
         <p:spPr>
           <a:xfrm>
-            <a:off x="8638531" y="3240172"/>
+            <a:off x="8638531" y="2861035"/>
             <a:ext cx="3193902" cy="954107"/>
           </a:xfrm>
           <a:prstGeom prst="rect">
@@ -4444,7 +4537,7 @@
           <p:cNvPr id="31" name="TextBox 30">
             <a:extLst>
               <a:ext uri="{FF2B5EF4-FFF2-40B4-BE49-F238E27FC236}">
-                <a16:creationId xmlns:a16="http://schemas.microsoft.com/office/drawing/2014/main" id="{F4B7D187-A2F9-DEE3-373D-1F566D4D7A2F}"/>
+                <a16:creationId xmlns:a16="http://schemas.microsoft.com/office/drawing/2014/main" id="{A8EFB5FE-4BB8-DBC1-5F65-A5B3607B95F8}"/>
               </a:ext>
             </a:extLst>
           </p:cNvPr>
@@ -4453,7 +4546,7 @@
         </p:nvSpPr>
         <p:spPr>
           <a:xfrm>
-            <a:off x="12209367" y="1818519"/>
+            <a:off x="12120159" y="1818519"/>
             <a:ext cx="3836027" cy="707886"/>
           </a:xfrm>
           <a:prstGeom prst="rect">
@@ -4480,7 +4573,7 @@
           <p:cNvPr id="32" name="TextBox 31">
             <a:extLst>
               <a:ext uri="{FF2B5EF4-FFF2-40B4-BE49-F238E27FC236}">
-                <a16:creationId xmlns:a16="http://schemas.microsoft.com/office/drawing/2014/main" id="{15305E56-D50A-7F90-DA4B-846C3EC9E904}"/>
+                <a16:creationId xmlns:a16="http://schemas.microsoft.com/office/drawing/2014/main" id="{F4E2D1F2-D7EB-6A4C-F1EA-9513EF041E37}"/>
               </a:ext>
             </a:extLst>
           </p:cNvPr>
@@ -4489,7 +4582,7 @@
         </p:nvSpPr>
         <p:spPr>
           <a:xfrm>
-            <a:off x="12209366" y="3229703"/>
+            <a:off x="12120158" y="2850566"/>
             <a:ext cx="3836028" cy="954107"/>
           </a:xfrm>
           <a:prstGeom prst="rect">
@@ -4516,7 +4609,7 @@
           <p:cNvPr id="33" name="TextBox 32">
             <a:extLst>
               <a:ext uri="{FF2B5EF4-FFF2-40B4-BE49-F238E27FC236}">
-                <a16:creationId xmlns:a16="http://schemas.microsoft.com/office/drawing/2014/main" id="{4DDB38B3-117D-19BD-737F-860A9184C5A9}"/>
+                <a16:creationId xmlns:a16="http://schemas.microsoft.com/office/drawing/2014/main" id="{476CCB20-C58D-7D69-F0CE-0E932CD96771}"/>
               </a:ext>
             </a:extLst>
           </p:cNvPr>
@@ -4525,7 +4618,7 @@
         </p:nvSpPr>
         <p:spPr>
           <a:xfrm>
-            <a:off x="16392233" y="1818519"/>
+            <a:off x="16280723" y="1818519"/>
             <a:ext cx="3836027" cy="707886"/>
           </a:xfrm>
           <a:prstGeom prst="rect">
@@ -4552,7 +4645,7 @@
           <p:cNvPr id="34" name="TextBox 33">
             <a:extLst>
               <a:ext uri="{FF2B5EF4-FFF2-40B4-BE49-F238E27FC236}">
-                <a16:creationId xmlns:a16="http://schemas.microsoft.com/office/drawing/2014/main" id="{B997B8B6-23ED-E4A5-232E-7938541CA229}"/>
+                <a16:creationId xmlns:a16="http://schemas.microsoft.com/office/drawing/2014/main" id="{84049BEC-CC63-F73F-7B8C-34AC6C33CE2E}"/>
               </a:ext>
             </a:extLst>
           </p:cNvPr>
@@ -4561,7 +4654,7 @@
         </p:nvSpPr>
         <p:spPr>
           <a:xfrm>
-            <a:off x="16392232" y="3211353"/>
+            <a:off x="16280722" y="2832216"/>
             <a:ext cx="3836028" cy="1421928"/>
           </a:xfrm>
           <a:prstGeom prst="rect">
@@ -4596,7 +4689,7 @@
           <p:cNvPr id="37" name="TextBox 36">
             <a:extLst>
               <a:ext uri="{FF2B5EF4-FFF2-40B4-BE49-F238E27FC236}">
-                <a16:creationId xmlns:a16="http://schemas.microsoft.com/office/drawing/2014/main" id="{FC57E627-96AD-DFD4-E96F-1455C1645D20}"/>
+                <a16:creationId xmlns:a16="http://schemas.microsoft.com/office/drawing/2014/main" id="{CE0EF62A-A10A-AE42-1D8E-1CCE0F9626F3}"/>
               </a:ext>
             </a:extLst>
           </p:cNvPr>
@@ -4605,7 +4698,7 @@
         </p:nvSpPr>
         <p:spPr>
           <a:xfrm>
-            <a:off x="20699909" y="1818519"/>
+            <a:off x="20588399" y="1818519"/>
             <a:ext cx="7521971" cy="707886"/>
           </a:xfrm>
           <a:prstGeom prst="rect">
@@ -4632,7 +4725,7 @@
           <p:cNvPr id="38" name="TextBox 37">
             <a:extLst>
               <a:ext uri="{FF2B5EF4-FFF2-40B4-BE49-F238E27FC236}">
-                <a16:creationId xmlns:a16="http://schemas.microsoft.com/office/drawing/2014/main" id="{998CB508-3EAD-33E6-6837-F4B5DFAC636C}"/>
+                <a16:creationId xmlns:a16="http://schemas.microsoft.com/office/drawing/2014/main" id="{959691BD-94A1-01AC-D2A4-C9694F19BF8B}"/>
               </a:ext>
             </a:extLst>
           </p:cNvPr>
@@ -4641,7 +4734,7 @@
         </p:nvSpPr>
         <p:spPr>
           <a:xfrm>
-            <a:off x="20720713" y="3227559"/>
+            <a:off x="20609203" y="2848422"/>
             <a:ext cx="7441986" cy="954107"/>
           </a:xfrm>
           <a:prstGeom prst="rect">
@@ -4671,72 +4764,12 @@
           </a:p>
         </p:txBody>
       </p:sp>
-      <p:pic>
-        <p:nvPicPr>
-          <p:cNvPr id="39" name="Picture 38">
-            <a:extLst>
-              <a:ext uri="{FF2B5EF4-FFF2-40B4-BE49-F238E27FC236}">
-                <a16:creationId xmlns:a16="http://schemas.microsoft.com/office/drawing/2014/main" id="{FF9DA12D-02A2-67CA-DAC4-18E251D2CC55}"/>
-              </a:ext>
-            </a:extLst>
-          </p:cNvPr>
-          <p:cNvPicPr>
-            <a:picLocks noChangeAspect="1"/>
-          </p:cNvPicPr>
-          <p:nvPr/>
-        </p:nvPicPr>
-        <p:blipFill>
-          <a:blip r:embed="rId4"/>
-          <a:stretch>
-            <a:fillRect/>
-          </a:stretch>
-        </p:blipFill>
-        <p:spPr>
-          <a:xfrm>
-            <a:off x="11962770" y="4961530"/>
-            <a:ext cx="4329220" cy="9679151"/>
-          </a:xfrm>
-          <a:prstGeom prst="rect">
-            <a:avLst/>
-          </a:prstGeom>
-        </p:spPr>
-      </p:pic>
-      <p:pic>
-        <p:nvPicPr>
-          <p:cNvPr id="40" name="Picture 39">
-            <a:extLst>
-              <a:ext uri="{FF2B5EF4-FFF2-40B4-BE49-F238E27FC236}">
-                <a16:creationId xmlns:a16="http://schemas.microsoft.com/office/drawing/2014/main" id="{287E46DB-C495-D118-9744-4468C9B41A90}"/>
-              </a:ext>
-            </a:extLst>
-          </p:cNvPr>
-          <p:cNvPicPr>
-            <a:picLocks noChangeAspect="1"/>
-          </p:cNvPicPr>
-          <p:nvPr/>
-        </p:nvPicPr>
-        <p:blipFill>
-          <a:blip r:embed="rId5"/>
-          <a:stretch>
-            <a:fillRect/>
-          </a:stretch>
-        </p:blipFill>
-        <p:spPr>
-          <a:xfrm>
-            <a:off x="16309989" y="4961530"/>
-            <a:ext cx="4000514" cy="10570464"/>
-          </a:xfrm>
-          <a:prstGeom prst="rect">
-            <a:avLst/>
-          </a:prstGeom>
-        </p:spPr>
-      </p:pic>
       <p:sp>
         <p:nvSpPr>
           <p:cNvPr id="42" name="Rectangle 41">
             <a:extLst>
               <a:ext uri="{FF2B5EF4-FFF2-40B4-BE49-F238E27FC236}">
-                <a16:creationId xmlns:a16="http://schemas.microsoft.com/office/drawing/2014/main" id="{9A5A9464-A374-7E7B-D0C4-768812F99D76}"/>
+                <a16:creationId xmlns:a16="http://schemas.microsoft.com/office/drawing/2014/main" id="{27211F82-A1B3-A426-21D3-73C18741CBFF}"/>
               </a:ext>
             </a:extLst>
           </p:cNvPr>
@@ -4752,6 +4785,9 @@
             <a:avLst/>
           </a:prstGeom>
           <a:noFill/>
+          <a:ln>
+            <a:noFill/>
+          </a:ln>
         </p:spPr>
         <p:style>
           <a:lnRef idx="2">
@@ -4806,7 +4842,7 @@
           <p:cNvPr id="43" name="Rectangle 42">
             <a:extLst>
               <a:ext uri="{FF2B5EF4-FFF2-40B4-BE49-F238E27FC236}">
-                <a16:creationId xmlns:a16="http://schemas.microsoft.com/office/drawing/2014/main" id="{E5C1822E-B070-7570-0A68-9B174591ACB5}"/>
+                <a16:creationId xmlns:a16="http://schemas.microsoft.com/office/drawing/2014/main" id="{AF80DC28-88B3-2E82-C633-928119E3BDFE}"/>
               </a:ext>
             </a:extLst>
           </p:cNvPr>
@@ -4822,6 +4858,9 @@
             <a:avLst/>
           </a:prstGeom>
           <a:noFill/>
+          <a:ln>
+            <a:noFill/>
+          </a:ln>
         </p:spPr>
         <p:style>
           <a:lnRef idx="2">
@@ -4871,7 +4910,7 @@
           <p:cNvPr id="44" name="Rectangle 43">
             <a:extLst>
               <a:ext uri="{FF2B5EF4-FFF2-40B4-BE49-F238E27FC236}">
-                <a16:creationId xmlns:a16="http://schemas.microsoft.com/office/drawing/2014/main" id="{F6E22C87-4119-0C2F-33E7-83388411FBD7}"/>
+                <a16:creationId xmlns:a16="http://schemas.microsoft.com/office/drawing/2014/main" id="{E5A050DE-4288-2C27-BA02-B4F2A10A9FF7}"/>
               </a:ext>
             </a:extLst>
           </p:cNvPr>
@@ -4887,6 +4926,9 @@
             <a:avLst/>
           </a:prstGeom>
           <a:noFill/>
+          <a:ln>
+            <a:noFill/>
+          </a:ln>
         </p:spPr>
         <p:style>
           <a:lnRef idx="2">
@@ -4925,7 +4967,7 @@
           <p:cNvPr id="45" name="Right Arrow 44">
             <a:extLst>
               <a:ext uri="{FF2B5EF4-FFF2-40B4-BE49-F238E27FC236}">
-                <a16:creationId xmlns:a16="http://schemas.microsoft.com/office/drawing/2014/main" id="{30E76013-155C-0D17-AF23-3E13F2899F48}"/>
+                <a16:creationId xmlns:a16="http://schemas.microsoft.com/office/drawing/2014/main" id="{2042058F-DB0D-F1F1-3A05-904600F97ACC}"/>
               </a:ext>
             </a:extLst>
           </p:cNvPr>
@@ -4976,7 +5018,7 @@
           <p:cNvPr id="46" name="Right Arrow 45">
             <a:extLst>
               <a:ext uri="{FF2B5EF4-FFF2-40B4-BE49-F238E27FC236}">
-                <a16:creationId xmlns:a16="http://schemas.microsoft.com/office/drawing/2014/main" id="{595504F0-9677-CEE6-37BD-E7A71328255C}"/>
+                <a16:creationId xmlns:a16="http://schemas.microsoft.com/office/drawing/2014/main" id="{5F8BF6B2-593C-AFED-AA87-CF44279E7157}"/>
               </a:ext>
             </a:extLst>
           </p:cNvPr>
@@ -5027,7 +5069,7 @@
           <p:cNvPr id="47" name="Right Arrow 46">
             <a:extLst>
               <a:ext uri="{FF2B5EF4-FFF2-40B4-BE49-F238E27FC236}">
-                <a16:creationId xmlns:a16="http://schemas.microsoft.com/office/drawing/2014/main" id="{81767445-A336-3FBD-C99E-034BF797E916}"/>
+                <a16:creationId xmlns:a16="http://schemas.microsoft.com/office/drawing/2014/main" id="{9135983D-7EAD-E95F-BC9C-3B89E7C993A3}"/>
               </a:ext>
             </a:extLst>
           </p:cNvPr>
@@ -5078,7 +5120,7 @@
           <p:cNvPr id="49" name="Right Arrow 48">
             <a:extLst>
               <a:ext uri="{FF2B5EF4-FFF2-40B4-BE49-F238E27FC236}">
-                <a16:creationId xmlns:a16="http://schemas.microsoft.com/office/drawing/2014/main" id="{8D346BC7-C3DE-AB11-5E9E-CA33D6A92D41}"/>
+                <a16:creationId xmlns:a16="http://schemas.microsoft.com/office/drawing/2014/main" id="{F35AAE06-E410-EBA4-844D-15FE2D7131A8}"/>
               </a:ext>
             </a:extLst>
           </p:cNvPr>
@@ -5129,7 +5171,7 @@
           <p:cNvPr id="52" name="Rectangle 51">
             <a:extLst>
               <a:ext uri="{FF2B5EF4-FFF2-40B4-BE49-F238E27FC236}">
-                <a16:creationId xmlns:a16="http://schemas.microsoft.com/office/drawing/2014/main" id="{A39D6F59-0934-E9B2-4EA3-885E1EE83DE9}"/>
+                <a16:creationId xmlns:a16="http://schemas.microsoft.com/office/drawing/2014/main" id="{0B62F166-2585-63AE-D1B0-5355A2584063}"/>
               </a:ext>
             </a:extLst>
           </p:cNvPr>
@@ -5174,40 +5216,3348 @@
           </a:p>
         </p:txBody>
       </p:sp>
-      <p:pic>
-        <p:nvPicPr>
-          <p:cNvPr id="2" name="Picture 1">
+      <p:sp>
+        <p:nvSpPr>
+          <p:cNvPr id="3" name="Rounded Rectangle 2">
             <a:extLst>
               <a:ext uri="{FF2B5EF4-FFF2-40B4-BE49-F238E27FC236}">
-                <a16:creationId xmlns:a16="http://schemas.microsoft.com/office/drawing/2014/main" id="{38F28117-67A9-6401-1723-3CAA8902FFA5}"/>
+                <a16:creationId xmlns:a16="http://schemas.microsoft.com/office/drawing/2014/main" id="{F8B587D6-A772-F8D4-411E-0E6A3D7DE513}"/>
               </a:ext>
             </a:extLst>
           </p:cNvPr>
-          <p:cNvPicPr>
-            <a:picLocks noChangeAspect="1"/>
-          </p:cNvPicPr>
+          <p:cNvSpPr/>
           <p:nvPr/>
-        </p:nvPicPr>
-        <p:blipFill>
-          <a:blip r:embed="rId6"/>
-          <a:stretch>
-            <a:fillRect/>
-          </a:stretch>
-        </p:blipFill>
+        </p:nvSpPr>
         <p:spPr>
           <a:xfrm>
-            <a:off x="20418248" y="4961530"/>
-            <a:ext cx="8153004" cy="10570464"/>
-          </a:xfrm>
-          <a:prstGeom prst="rect">
+            <a:off x="9295834" y="4642028"/>
+            <a:ext cx="1862338" cy="713762"/>
+          </a:xfrm>
+          <a:prstGeom prst="roundRect">
             <a:avLst/>
           </a:prstGeom>
-        </p:spPr>
-      </p:pic>
+          <a:noFill/>
+          <a:ln>
+            <a:solidFill>
+              <a:schemeClr val="accent1">
+                <a:lumMod val="75000"/>
+              </a:schemeClr>
+            </a:solidFill>
+          </a:ln>
+        </p:spPr>
+        <p:style>
+          <a:lnRef idx="2">
+            <a:schemeClr val="accent1">
+              <a:shade val="15000"/>
+            </a:schemeClr>
+          </a:lnRef>
+          <a:fillRef idx="1">
+            <a:schemeClr val="accent1"/>
+          </a:fillRef>
+          <a:effectRef idx="0">
+            <a:schemeClr val="accent1"/>
+          </a:effectRef>
+          <a:fontRef idx="minor">
+            <a:schemeClr val="lt1"/>
+          </a:fontRef>
+        </p:style>
+        <p:txBody>
+          <a:bodyPr rtlCol="0" anchor="ctr"/>
+          <a:lstStyle/>
+          <a:p>
+            <a:pPr algn="ctr"/>
+            <a:r>
+              <a:rPr lang="en-US" sz="2400" dirty="0">
+                <a:solidFill>
+                  <a:schemeClr val="tx1"/>
+                </a:solidFill>
+              </a:rPr>
+              <a:t>Start</a:t>
+            </a:r>
+          </a:p>
+        </p:txBody>
+      </p:sp>
+      <p:sp>
+        <p:nvSpPr>
+          <p:cNvPr id="7" name="Rounded Rectangle 6">
+            <a:extLst>
+              <a:ext uri="{FF2B5EF4-FFF2-40B4-BE49-F238E27FC236}">
+                <a16:creationId xmlns:a16="http://schemas.microsoft.com/office/drawing/2014/main" id="{D2160C16-C1B2-F029-10DD-B055FD2FB839}"/>
+              </a:ext>
+            </a:extLst>
+          </p:cNvPr>
+          <p:cNvSpPr/>
+          <p:nvPr/>
+        </p:nvSpPr>
+        <p:spPr>
+          <a:xfrm>
+            <a:off x="8790673" y="5796254"/>
+            <a:ext cx="1862338" cy="1490472"/>
+          </a:xfrm>
+          <a:prstGeom prst="roundRect">
+            <a:avLst/>
+          </a:prstGeom>
+          <a:noFill/>
+          <a:ln>
+            <a:solidFill>
+              <a:schemeClr val="accent1">
+                <a:lumMod val="75000"/>
+              </a:schemeClr>
+            </a:solidFill>
+          </a:ln>
+        </p:spPr>
+        <p:style>
+          <a:lnRef idx="2">
+            <a:schemeClr val="accent1">
+              <a:shade val="15000"/>
+            </a:schemeClr>
+          </a:lnRef>
+          <a:fillRef idx="1">
+            <a:schemeClr val="accent1"/>
+          </a:fillRef>
+          <a:effectRef idx="0">
+            <a:schemeClr val="accent1"/>
+          </a:effectRef>
+          <a:fontRef idx="minor">
+            <a:schemeClr val="lt1"/>
+          </a:fontRef>
+        </p:style>
+        <p:txBody>
+          <a:bodyPr rtlCol="0" anchor="ctr"/>
+          <a:lstStyle/>
+          <a:p>
+            <a:pPr algn="ctr"/>
+            <a:r>
+              <a:rPr lang="en-US" sz="2400" dirty="0">
+                <a:solidFill>
+                  <a:schemeClr val="tx1"/>
+                </a:solidFill>
+              </a:rPr>
+              <a:t>Summarize Previous Content</a:t>
+            </a:r>
+          </a:p>
+        </p:txBody>
+      </p:sp>
+      <p:sp>
+        <p:nvSpPr>
+          <p:cNvPr id="8" name="Rounded Rectangle 7">
+            <a:extLst>
+              <a:ext uri="{FF2B5EF4-FFF2-40B4-BE49-F238E27FC236}">
+                <a16:creationId xmlns:a16="http://schemas.microsoft.com/office/drawing/2014/main" id="{33BDF351-2598-5557-EBA6-9CF291FB16B5}"/>
+              </a:ext>
+            </a:extLst>
+          </p:cNvPr>
+          <p:cNvSpPr/>
+          <p:nvPr/>
+        </p:nvSpPr>
+        <p:spPr>
+          <a:xfrm>
+            <a:off x="8749337" y="7727190"/>
+            <a:ext cx="2960960" cy="713762"/>
+          </a:xfrm>
+          <a:prstGeom prst="roundRect">
+            <a:avLst/>
+          </a:prstGeom>
+          <a:noFill/>
+          <a:ln>
+            <a:solidFill>
+              <a:schemeClr val="accent1">
+                <a:lumMod val="75000"/>
+              </a:schemeClr>
+            </a:solidFill>
+          </a:ln>
+        </p:spPr>
+        <p:style>
+          <a:lnRef idx="2">
+            <a:schemeClr val="accent1">
+              <a:shade val="15000"/>
+            </a:schemeClr>
+          </a:lnRef>
+          <a:fillRef idx="1">
+            <a:schemeClr val="accent1"/>
+          </a:fillRef>
+          <a:effectRef idx="0">
+            <a:schemeClr val="accent1"/>
+          </a:effectRef>
+          <a:fontRef idx="minor">
+            <a:schemeClr val="lt1"/>
+          </a:fontRef>
+        </p:style>
+        <p:txBody>
+          <a:bodyPr rtlCol="0" anchor="ctr"/>
+          <a:lstStyle/>
+          <a:p>
+            <a:pPr algn="ctr"/>
+            <a:r>
+              <a:rPr lang="en-US" sz="2400" dirty="0">
+                <a:solidFill>
+                  <a:schemeClr val="tx1"/>
+                </a:solidFill>
+              </a:rPr>
+              <a:t>Generate Content</a:t>
+            </a:r>
+          </a:p>
+        </p:txBody>
+      </p:sp>
+      <p:sp>
+        <p:nvSpPr>
+          <p:cNvPr id="9" name="Rounded Rectangle 8">
+            <a:extLst>
+              <a:ext uri="{FF2B5EF4-FFF2-40B4-BE49-F238E27FC236}">
+                <a16:creationId xmlns:a16="http://schemas.microsoft.com/office/drawing/2014/main" id="{1C9C30F9-2560-BFDF-C6A7-72C42BC87726}"/>
+              </a:ext>
+            </a:extLst>
+          </p:cNvPr>
+          <p:cNvSpPr/>
+          <p:nvPr/>
+        </p:nvSpPr>
+        <p:spPr>
+          <a:xfrm>
+            <a:off x="8760119" y="8881416"/>
+            <a:ext cx="1862338" cy="1488322"/>
+          </a:xfrm>
+          <a:prstGeom prst="roundRect">
+            <a:avLst/>
+          </a:prstGeom>
+          <a:noFill/>
+          <a:ln>
+            <a:solidFill>
+              <a:schemeClr val="accent1">
+                <a:lumMod val="75000"/>
+              </a:schemeClr>
+            </a:solidFill>
+          </a:ln>
+        </p:spPr>
+        <p:style>
+          <a:lnRef idx="2">
+            <a:schemeClr val="accent1">
+              <a:shade val="15000"/>
+            </a:schemeClr>
+          </a:lnRef>
+          <a:fillRef idx="1">
+            <a:schemeClr val="accent1"/>
+          </a:fillRef>
+          <a:effectRef idx="0">
+            <a:schemeClr val="accent1"/>
+          </a:effectRef>
+          <a:fontRef idx="minor">
+            <a:schemeClr val="lt1"/>
+          </a:fontRef>
+        </p:style>
+        <p:txBody>
+          <a:bodyPr rtlCol="0" anchor="ctr"/>
+          <a:lstStyle/>
+          <a:p>
+            <a:pPr algn="ctr"/>
+            <a:r>
+              <a:rPr lang="en-US" sz="2400" dirty="0">
+                <a:solidFill>
+                  <a:schemeClr val="tx1"/>
+                </a:solidFill>
+              </a:rPr>
+              <a:t>Summarize Generated Content</a:t>
+            </a:r>
+          </a:p>
+        </p:txBody>
+      </p:sp>
+      <p:sp>
+        <p:nvSpPr>
+          <p:cNvPr id="10" name="Rounded Rectangle 9">
+            <a:extLst>
+              <a:ext uri="{FF2B5EF4-FFF2-40B4-BE49-F238E27FC236}">
+                <a16:creationId xmlns:a16="http://schemas.microsoft.com/office/drawing/2014/main" id="{93F7BD88-6FF6-E8E4-3188-A4C1A4CFC7C5}"/>
+              </a:ext>
+            </a:extLst>
+          </p:cNvPr>
+          <p:cNvSpPr/>
+          <p:nvPr/>
+        </p:nvSpPr>
+        <p:spPr>
+          <a:xfrm>
+            <a:off x="9295834" y="10832742"/>
+            <a:ext cx="1862338" cy="713762"/>
+          </a:xfrm>
+          <a:prstGeom prst="roundRect">
+            <a:avLst/>
+          </a:prstGeom>
+          <a:noFill/>
+          <a:ln>
+            <a:solidFill>
+              <a:schemeClr val="accent1">
+                <a:lumMod val="75000"/>
+              </a:schemeClr>
+            </a:solidFill>
+          </a:ln>
+        </p:spPr>
+        <p:style>
+          <a:lnRef idx="2">
+            <a:schemeClr val="accent1">
+              <a:shade val="15000"/>
+            </a:schemeClr>
+          </a:lnRef>
+          <a:fillRef idx="1">
+            <a:schemeClr val="accent1"/>
+          </a:fillRef>
+          <a:effectRef idx="0">
+            <a:schemeClr val="accent1"/>
+          </a:effectRef>
+          <a:fontRef idx="minor">
+            <a:schemeClr val="lt1"/>
+          </a:fontRef>
+        </p:style>
+        <p:txBody>
+          <a:bodyPr rtlCol="0" anchor="ctr"/>
+          <a:lstStyle/>
+          <a:p>
+            <a:pPr algn="ctr"/>
+            <a:r>
+              <a:rPr lang="en-US" sz="2400" dirty="0">
+                <a:solidFill>
+                  <a:schemeClr val="tx1"/>
+                </a:solidFill>
+              </a:rPr>
+              <a:t>End</a:t>
+            </a:r>
+          </a:p>
+        </p:txBody>
+      </p:sp>
+      <p:cxnSp>
+        <p:nvCxnSpPr>
+          <p:cNvPr id="12" name="Elbow Connector 11">
+            <a:extLst>
+              <a:ext uri="{FF2B5EF4-FFF2-40B4-BE49-F238E27FC236}">
+                <a16:creationId xmlns:a16="http://schemas.microsoft.com/office/drawing/2014/main" id="{A6D45E8D-F0DD-4C0F-8D4E-D97E7D933A98}"/>
+              </a:ext>
+            </a:extLst>
+          </p:cNvPr>
+          <p:cNvCxnSpPr>
+            <a:cxnSpLocks/>
+            <a:endCxn id="7" idx="0"/>
+          </p:cNvCxnSpPr>
+          <p:nvPr/>
+        </p:nvCxnSpPr>
+        <p:spPr>
+          <a:xfrm flipH="1">
+            <a:off x="9721842" y="5410930"/>
+            <a:ext cx="10472" cy="385324"/>
+          </a:xfrm>
+          <a:prstGeom prst="straightConnector1">
+            <a:avLst/>
+          </a:prstGeom>
+          <a:ln w="38100">
+            <a:prstDash val="sysDot"/>
+            <a:tailEnd type="arrow"/>
+          </a:ln>
+        </p:spPr>
+        <p:style>
+          <a:lnRef idx="2">
+            <a:schemeClr val="dk1"/>
+          </a:lnRef>
+          <a:fillRef idx="0">
+            <a:schemeClr val="dk1"/>
+          </a:fillRef>
+          <a:effectRef idx="1">
+            <a:schemeClr val="dk1"/>
+          </a:effectRef>
+          <a:fontRef idx="minor">
+            <a:schemeClr val="tx1"/>
+          </a:fontRef>
+        </p:style>
+      </p:cxnSp>
+      <p:cxnSp>
+        <p:nvCxnSpPr>
+          <p:cNvPr id="68" name="Elbow Connector 67">
+            <a:extLst>
+              <a:ext uri="{FF2B5EF4-FFF2-40B4-BE49-F238E27FC236}">
+                <a16:creationId xmlns:a16="http://schemas.microsoft.com/office/drawing/2014/main" id="{C76C4A6A-3663-9357-8D20-05999C274A9B}"/>
+              </a:ext>
+            </a:extLst>
+          </p:cNvPr>
+          <p:cNvCxnSpPr>
+            <a:cxnSpLocks/>
+          </p:cNvCxnSpPr>
+          <p:nvPr/>
+        </p:nvCxnSpPr>
+        <p:spPr>
+          <a:xfrm>
+            <a:off x="10794493" y="5355790"/>
+            <a:ext cx="0" cy="2371400"/>
+          </a:xfrm>
+          <a:prstGeom prst="straightConnector1">
+            <a:avLst/>
+          </a:prstGeom>
+          <a:ln w="38100">
+            <a:prstDash val="sysDot"/>
+            <a:tailEnd type="arrow"/>
+          </a:ln>
+        </p:spPr>
+        <p:style>
+          <a:lnRef idx="2">
+            <a:schemeClr val="dk1"/>
+          </a:lnRef>
+          <a:fillRef idx="0">
+            <a:schemeClr val="dk1"/>
+          </a:fillRef>
+          <a:effectRef idx="1">
+            <a:schemeClr val="dk1"/>
+          </a:effectRef>
+          <a:fontRef idx="minor">
+            <a:schemeClr val="tx1"/>
+          </a:fontRef>
+        </p:style>
+      </p:cxnSp>
+      <p:cxnSp>
+        <p:nvCxnSpPr>
+          <p:cNvPr id="71" name="Elbow Connector 70">
+            <a:extLst>
+              <a:ext uri="{FF2B5EF4-FFF2-40B4-BE49-F238E27FC236}">
+                <a16:creationId xmlns:a16="http://schemas.microsoft.com/office/drawing/2014/main" id="{AD87EF51-47A0-F1F4-82B9-6AE63ACA0BC6}"/>
+              </a:ext>
+            </a:extLst>
+          </p:cNvPr>
+          <p:cNvCxnSpPr>
+            <a:cxnSpLocks/>
+            <a:endCxn id="9" idx="0"/>
+          </p:cNvCxnSpPr>
+          <p:nvPr/>
+        </p:nvCxnSpPr>
+        <p:spPr>
+          <a:xfrm>
+            <a:off x="9691288" y="8438617"/>
+            <a:ext cx="0" cy="442799"/>
+          </a:xfrm>
+          <a:prstGeom prst="straightConnector1">
+            <a:avLst/>
+          </a:prstGeom>
+          <a:ln w="38100">
+            <a:prstDash val="sysDot"/>
+            <a:tailEnd type="arrow"/>
+          </a:ln>
+        </p:spPr>
+        <p:style>
+          <a:lnRef idx="2">
+            <a:schemeClr val="dk1"/>
+          </a:lnRef>
+          <a:fillRef idx="0">
+            <a:schemeClr val="dk1"/>
+          </a:fillRef>
+          <a:effectRef idx="1">
+            <a:schemeClr val="dk1"/>
+          </a:effectRef>
+          <a:fontRef idx="minor">
+            <a:schemeClr val="tx1"/>
+          </a:fontRef>
+        </p:style>
+      </p:cxnSp>
+      <p:cxnSp>
+        <p:nvCxnSpPr>
+          <p:cNvPr id="72" name="Elbow Connector 71">
+            <a:extLst>
+              <a:ext uri="{FF2B5EF4-FFF2-40B4-BE49-F238E27FC236}">
+                <a16:creationId xmlns:a16="http://schemas.microsoft.com/office/drawing/2014/main" id="{71194E2A-AB17-D49B-5E19-4ADE2F803724}"/>
+              </a:ext>
+            </a:extLst>
+          </p:cNvPr>
+          <p:cNvCxnSpPr>
+            <a:cxnSpLocks/>
+          </p:cNvCxnSpPr>
+          <p:nvPr/>
+        </p:nvCxnSpPr>
+        <p:spPr>
+          <a:xfrm>
+            <a:off x="10816683" y="8438617"/>
+            <a:ext cx="0" cy="2394125"/>
+          </a:xfrm>
+          <a:prstGeom prst="straightConnector1">
+            <a:avLst/>
+          </a:prstGeom>
+          <a:ln w="38100">
+            <a:prstDash val="sysDot"/>
+            <a:tailEnd type="arrow"/>
+          </a:ln>
+        </p:spPr>
+        <p:style>
+          <a:lnRef idx="2">
+            <a:schemeClr val="dk1"/>
+          </a:lnRef>
+          <a:fillRef idx="0">
+            <a:schemeClr val="dk1"/>
+          </a:fillRef>
+          <a:effectRef idx="1">
+            <a:schemeClr val="dk1"/>
+          </a:effectRef>
+          <a:fontRef idx="minor">
+            <a:schemeClr val="tx1"/>
+          </a:fontRef>
+        </p:style>
+      </p:cxnSp>
+      <p:cxnSp>
+        <p:nvCxnSpPr>
+          <p:cNvPr id="73" name="Elbow Connector 72">
+            <a:extLst>
+              <a:ext uri="{FF2B5EF4-FFF2-40B4-BE49-F238E27FC236}">
+                <a16:creationId xmlns:a16="http://schemas.microsoft.com/office/drawing/2014/main" id="{3EDE6EB1-1036-AD76-CAD0-47638C282449}"/>
+              </a:ext>
+            </a:extLst>
+          </p:cNvPr>
+          <p:cNvCxnSpPr>
+            <a:cxnSpLocks/>
+            <a:stCxn id="7" idx="2"/>
+          </p:cNvCxnSpPr>
+          <p:nvPr/>
+        </p:nvCxnSpPr>
+        <p:spPr>
+          <a:xfrm>
+            <a:off x="9721842" y="7286726"/>
+            <a:ext cx="0" cy="438314"/>
+          </a:xfrm>
+          <a:prstGeom prst="straightConnector1">
+            <a:avLst/>
+          </a:prstGeom>
+          <a:ln w="38100">
+            <a:prstDash val="sysDot"/>
+            <a:tailEnd type="arrow"/>
+          </a:ln>
+        </p:spPr>
+        <p:style>
+          <a:lnRef idx="2">
+            <a:schemeClr val="dk1"/>
+          </a:lnRef>
+          <a:fillRef idx="0">
+            <a:schemeClr val="dk1"/>
+          </a:fillRef>
+          <a:effectRef idx="1">
+            <a:schemeClr val="dk1"/>
+          </a:effectRef>
+          <a:fontRef idx="minor">
+            <a:schemeClr val="tx1"/>
+          </a:fontRef>
+        </p:style>
+      </p:cxnSp>
+      <p:cxnSp>
+        <p:nvCxnSpPr>
+          <p:cNvPr id="74" name="Elbow Connector 73">
+            <a:extLst>
+              <a:ext uri="{FF2B5EF4-FFF2-40B4-BE49-F238E27FC236}">
+                <a16:creationId xmlns:a16="http://schemas.microsoft.com/office/drawing/2014/main" id="{1F709AE1-3085-CB41-AA4B-3462CEE33D91}"/>
+              </a:ext>
+            </a:extLst>
+          </p:cNvPr>
+          <p:cNvCxnSpPr>
+            <a:cxnSpLocks/>
+            <a:stCxn id="9" idx="2"/>
+          </p:cNvCxnSpPr>
+          <p:nvPr/>
+        </p:nvCxnSpPr>
+        <p:spPr>
+          <a:xfrm>
+            <a:off x="9691288" y="10369738"/>
+            <a:ext cx="0" cy="463004"/>
+          </a:xfrm>
+          <a:prstGeom prst="straightConnector1">
+            <a:avLst/>
+          </a:prstGeom>
+          <a:ln w="38100">
+            <a:prstDash val="sysDot"/>
+            <a:tailEnd type="arrow"/>
+          </a:ln>
+        </p:spPr>
+        <p:style>
+          <a:lnRef idx="2">
+            <a:schemeClr val="dk1"/>
+          </a:lnRef>
+          <a:fillRef idx="0">
+            <a:schemeClr val="dk1"/>
+          </a:fillRef>
+          <a:effectRef idx="1">
+            <a:schemeClr val="dk1"/>
+          </a:effectRef>
+          <a:fontRef idx="minor">
+            <a:schemeClr val="tx1"/>
+          </a:fontRef>
+        </p:style>
+      </p:cxnSp>
+      <p:sp>
+        <p:nvSpPr>
+          <p:cNvPr id="94" name="Rounded Rectangle 93">
+            <a:extLst>
+              <a:ext uri="{FF2B5EF4-FFF2-40B4-BE49-F238E27FC236}">
+                <a16:creationId xmlns:a16="http://schemas.microsoft.com/office/drawing/2014/main" id="{8535AAE7-5161-BF93-1ABE-EA6665F6A3CC}"/>
+              </a:ext>
+            </a:extLst>
+          </p:cNvPr>
+          <p:cNvSpPr/>
+          <p:nvPr/>
+        </p:nvSpPr>
+        <p:spPr>
+          <a:xfrm>
+            <a:off x="13172740" y="4660616"/>
+            <a:ext cx="1862338" cy="713762"/>
+          </a:xfrm>
+          <a:prstGeom prst="roundRect">
+            <a:avLst/>
+          </a:prstGeom>
+          <a:noFill/>
+          <a:ln>
+            <a:solidFill>
+              <a:schemeClr val="accent1">
+                <a:lumMod val="75000"/>
+              </a:schemeClr>
+            </a:solidFill>
+          </a:ln>
+        </p:spPr>
+        <p:style>
+          <a:lnRef idx="2">
+            <a:schemeClr val="accent1">
+              <a:shade val="15000"/>
+            </a:schemeClr>
+          </a:lnRef>
+          <a:fillRef idx="1">
+            <a:schemeClr val="accent1"/>
+          </a:fillRef>
+          <a:effectRef idx="0">
+            <a:schemeClr val="accent1"/>
+          </a:effectRef>
+          <a:fontRef idx="minor">
+            <a:schemeClr val="lt1"/>
+          </a:fontRef>
+        </p:style>
+        <p:txBody>
+          <a:bodyPr rtlCol="0" anchor="ctr"/>
+          <a:lstStyle/>
+          <a:p>
+            <a:pPr algn="ctr"/>
+            <a:r>
+              <a:rPr lang="en-US" sz="2400" dirty="0">
+                <a:solidFill>
+                  <a:schemeClr val="tx1"/>
+                </a:solidFill>
+              </a:rPr>
+              <a:t>Start</a:t>
+            </a:r>
+          </a:p>
+        </p:txBody>
+      </p:sp>
+      <p:sp>
+        <p:nvSpPr>
+          <p:cNvPr id="95" name="Rounded Rectangle 94">
+            <a:extLst>
+              <a:ext uri="{FF2B5EF4-FFF2-40B4-BE49-F238E27FC236}">
+                <a16:creationId xmlns:a16="http://schemas.microsoft.com/office/drawing/2014/main" id="{BF514009-E522-9E72-D898-E5AD3C3A50D1}"/>
+              </a:ext>
+            </a:extLst>
+          </p:cNvPr>
+          <p:cNvSpPr/>
+          <p:nvPr/>
+        </p:nvSpPr>
+        <p:spPr>
+          <a:xfrm>
+            <a:off x="12667579" y="5841835"/>
+            <a:ext cx="1862338" cy="1490472"/>
+          </a:xfrm>
+          <a:prstGeom prst="roundRect">
+            <a:avLst/>
+          </a:prstGeom>
+          <a:noFill/>
+          <a:ln>
+            <a:solidFill>
+              <a:schemeClr val="accent1">
+                <a:lumMod val="75000"/>
+              </a:schemeClr>
+            </a:solidFill>
+          </a:ln>
+        </p:spPr>
+        <p:style>
+          <a:lnRef idx="2">
+            <a:schemeClr val="accent1">
+              <a:shade val="15000"/>
+            </a:schemeClr>
+          </a:lnRef>
+          <a:fillRef idx="1">
+            <a:schemeClr val="accent1"/>
+          </a:fillRef>
+          <a:effectRef idx="0">
+            <a:schemeClr val="accent1"/>
+          </a:effectRef>
+          <a:fontRef idx="minor">
+            <a:schemeClr val="lt1"/>
+          </a:fontRef>
+        </p:style>
+        <p:txBody>
+          <a:bodyPr rtlCol="0" anchor="ctr"/>
+          <a:lstStyle/>
+          <a:p>
+            <a:pPr algn="ctr"/>
+            <a:r>
+              <a:rPr lang="en-US" sz="2400" dirty="0">
+                <a:solidFill>
+                  <a:schemeClr val="tx1"/>
+                </a:solidFill>
+              </a:rPr>
+              <a:t>Summarize Previous Content</a:t>
+            </a:r>
+          </a:p>
+        </p:txBody>
+      </p:sp>
+      <p:sp>
+        <p:nvSpPr>
+          <p:cNvPr id="96" name="Rounded Rectangle 95">
+            <a:extLst>
+              <a:ext uri="{FF2B5EF4-FFF2-40B4-BE49-F238E27FC236}">
+                <a16:creationId xmlns:a16="http://schemas.microsoft.com/office/drawing/2014/main" id="{2EB983B2-A393-4DC6-14D8-7971BBF643CB}"/>
+              </a:ext>
+            </a:extLst>
+          </p:cNvPr>
+          <p:cNvSpPr/>
+          <p:nvPr/>
+        </p:nvSpPr>
+        <p:spPr>
+          <a:xfrm>
+            <a:off x="12549991" y="10390619"/>
+            <a:ext cx="2960960" cy="713762"/>
+          </a:xfrm>
+          <a:prstGeom prst="roundRect">
+            <a:avLst/>
+          </a:prstGeom>
+          <a:noFill/>
+          <a:ln>
+            <a:solidFill>
+              <a:schemeClr val="accent1">
+                <a:lumMod val="75000"/>
+              </a:schemeClr>
+            </a:solidFill>
+          </a:ln>
+        </p:spPr>
+        <p:style>
+          <a:lnRef idx="2">
+            <a:schemeClr val="accent1">
+              <a:shade val="15000"/>
+            </a:schemeClr>
+          </a:lnRef>
+          <a:fillRef idx="1">
+            <a:schemeClr val="accent1"/>
+          </a:fillRef>
+          <a:effectRef idx="0">
+            <a:schemeClr val="accent1"/>
+          </a:effectRef>
+          <a:fontRef idx="minor">
+            <a:schemeClr val="lt1"/>
+          </a:fontRef>
+        </p:style>
+        <p:txBody>
+          <a:bodyPr rtlCol="0" anchor="ctr"/>
+          <a:lstStyle/>
+          <a:p>
+            <a:pPr algn="ctr"/>
+            <a:r>
+              <a:rPr lang="en-US" sz="2400" dirty="0">
+                <a:solidFill>
+                  <a:schemeClr val="tx1"/>
+                </a:solidFill>
+              </a:rPr>
+              <a:t>Generate Content</a:t>
+            </a:r>
+          </a:p>
+        </p:txBody>
+      </p:sp>
+      <p:sp>
+        <p:nvSpPr>
+          <p:cNvPr id="97" name="Rounded Rectangle 96">
+            <a:extLst>
+              <a:ext uri="{FF2B5EF4-FFF2-40B4-BE49-F238E27FC236}">
+                <a16:creationId xmlns:a16="http://schemas.microsoft.com/office/drawing/2014/main" id="{6E4A0037-3985-B90B-E02D-1F1A0E1F4B5C}"/>
+              </a:ext>
+            </a:extLst>
+          </p:cNvPr>
+          <p:cNvSpPr/>
+          <p:nvPr/>
+        </p:nvSpPr>
+        <p:spPr>
+          <a:xfrm>
+            <a:off x="12637025" y="11571838"/>
+            <a:ext cx="1862338" cy="1488322"/>
+          </a:xfrm>
+          <a:prstGeom prst="roundRect">
+            <a:avLst/>
+          </a:prstGeom>
+          <a:noFill/>
+          <a:ln>
+            <a:solidFill>
+              <a:schemeClr val="accent1">
+                <a:lumMod val="75000"/>
+              </a:schemeClr>
+            </a:solidFill>
+          </a:ln>
+        </p:spPr>
+        <p:style>
+          <a:lnRef idx="2">
+            <a:schemeClr val="accent1">
+              <a:shade val="15000"/>
+            </a:schemeClr>
+          </a:lnRef>
+          <a:fillRef idx="1">
+            <a:schemeClr val="accent1"/>
+          </a:fillRef>
+          <a:effectRef idx="0">
+            <a:schemeClr val="accent1"/>
+          </a:effectRef>
+          <a:fontRef idx="minor">
+            <a:schemeClr val="lt1"/>
+          </a:fontRef>
+        </p:style>
+        <p:txBody>
+          <a:bodyPr rtlCol="0" anchor="ctr"/>
+          <a:lstStyle/>
+          <a:p>
+            <a:pPr algn="ctr"/>
+            <a:r>
+              <a:rPr lang="en-US" sz="2400" dirty="0">
+                <a:solidFill>
+                  <a:schemeClr val="tx1"/>
+                </a:solidFill>
+              </a:rPr>
+              <a:t>Summarize Generated Content</a:t>
+            </a:r>
+          </a:p>
+        </p:txBody>
+      </p:sp>
+      <p:sp>
+        <p:nvSpPr>
+          <p:cNvPr id="98" name="Rounded Rectangle 97">
+            <a:extLst>
+              <a:ext uri="{FF2B5EF4-FFF2-40B4-BE49-F238E27FC236}">
+                <a16:creationId xmlns:a16="http://schemas.microsoft.com/office/drawing/2014/main" id="{402A43AD-1DDF-AA42-90F8-9A02C077D2FA}"/>
+              </a:ext>
+            </a:extLst>
+          </p:cNvPr>
+          <p:cNvSpPr/>
+          <p:nvPr/>
+        </p:nvSpPr>
+        <p:spPr>
+          <a:xfrm>
+            <a:off x="13172740" y="13527615"/>
+            <a:ext cx="1862338" cy="713762"/>
+          </a:xfrm>
+          <a:prstGeom prst="roundRect">
+            <a:avLst/>
+          </a:prstGeom>
+          <a:noFill/>
+          <a:ln>
+            <a:solidFill>
+              <a:schemeClr val="accent1">
+                <a:lumMod val="75000"/>
+              </a:schemeClr>
+            </a:solidFill>
+          </a:ln>
+        </p:spPr>
+        <p:style>
+          <a:lnRef idx="2">
+            <a:schemeClr val="accent1">
+              <a:shade val="15000"/>
+            </a:schemeClr>
+          </a:lnRef>
+          <a:fillRef idx="1">
+            <a:schemeClr val="accent1"/>
+          </a:fillRef>
+          <a:effectRef idx="0">
+            <a:schemeClr val="accent1"/>
+          </a:effectRef>
+          <a:fontRef idx="minor">
+            <a:schemeClr val="lt1"/>
+          </a:fontRef>
+        </p:style>
+        <p:txBody>
+          <a:bodyPr rtlCol="0" anchor="ctr"/>
+          <a:lstStyle/>
+          <a:p>
+            <a:pPr algn="ctr"/>
+            <a:r>
+              <a:rPr lang="en-US" sz="2400" dirty="0">
+                <a:solidFill>
+                  <a:schemeClr val="tx1"/>
+                </a:solidFill>
+              </a:rPr>
+              <a:t>End</a:t>
+            </a:r>
+          </a:p>
+        </p:txBody>
+      </p:sp>
+      <p:cxnSp>
+        <p:nvCxnSpPr>
+          <p:cNvPr id="99" name="Elbow Connector 11">
+            <a:extLst>
+              <a:ext uri="{FF2B5EF4-FFF2-40B4-BE49-F238E27FC236}">
+                <a16:creationId xmlns:a16="http://schemas.microsoft.com/office/drawing/2014/main" id="{02605D7A-3BA3-6282-606A-8353A80C44CE}"/>
+              </a:ext>
+            </a:extLst>
+          </p:cNvPr>
+          <p:cNvCxnSpPr>
+            <a:cxnSpLocks/>
+            <a:endCxn id="95" idx="0"/>
+          </p:cNvCxnSpPr>
+          <p:nvPr/>
+        </p:nvCxnSpPr>
+        <p:spPr>
+          <a:xfrm flipH="1">
+            <a:off x="13598748" y="5429518"/>
+            <a:ext cx="10472" cy="412317"/>
+          </a:xfrm>
+          <a:prstGeom prst="straightConnector1">
+            <a:avLst/>
+          </a:prstGeom>
+          <a:ln w="38100">
+            <a:prstDash val="sysDot"/>
+            <a:tailEnd type="arrow"/>
+          </a:ln>
+        </p:spPr>
+        <p:style>
+          <a:lnRef idx="2">
+            <a:schemeClr val="dk1"/>
+          </a:lnRef>
+          <a:fillRef idx="0">
+            <a:schemeClr val="dk1"/>
+          </a:fillRef>
+          <a:effectRef idx="1">
+            <a:schemeClr val="dk1"/>
+          </a:effectRef>
+          <a:fontRef idx="minor">
+            <a:schemeClr val="tx1"/>
+          </a:fontRef>
+        </p:style>
+      </p:cxnSp>
+      <p:cxnSp>
+        <p:nvCxnSpPr>
+          <p:cNvPr id="100" name="Elbow Connector 67">
+            <a:extLst>
+              <a:ext uri="{FF2B5EF4-FFF2-40B4-BE49-F238E27FC236}">
+                <a16:creationId xmlns:a16="http://schemas.microsoft.com/office/drawing/2014/main" id="{142D14A3-2382-5D19-0720-6C83A132FB90}"/>
+              </a:ext>
+            </a:extLst>
+          </p:cNvPr>
+          <p:cNvCxnSpPr>
+            <a:cxnSpLocks/>
+          </p:cNvCxnSpPr>
+          <p:nvPr/>
+        </p:nvCxnSpPr>
+        <p:spPr>
+          <a:xfrm>
+            <a:off x="14671399" y="5374378"/>
+            <a:ext cx="0" cy="2423234"/>
+          </a:xfrm>
+          <a:prstGeom prst="straightConnector1">
+            <a:avLst/>
+          </a:prstGeom>
+          <a:ln w="38100">
+            <a:prstDash val="sysDot"/>
+            <a:tailEnd type="arrow"/>
+          </a:ln>
+        </p:spPr>
+        <p:style>
+          <a:lnRef idx="2">
+            <a:schemeClr val="dk1"/>
+          </a:lnRef>
+          <a:fillRef idx="0">
+            <a:schemeClr val="dk1"/>
+          </a:fillRef>
+          <a:effectRef idx="1">
+            <a:schemeClr val="dk1"/>
+          </a:effectRef>
+          <a:fontRef idx="minor">
+            <a:schemeClr val="tx1"/>
+          </a:fontRef>
+        </p:style>
+      </p:cxnSp>
+      <p:cxnSp>
+        <p:nvCxnSpPr>
+          <p:cNvPr id="101" name="Elbow Connector 70">
+            <a:extLst>
+              <a:ext uri="{FF2B5EF4-FFF2-40B4-BE49-F238E27FC236}">
+                <a16:creationId xmlns:a16="http://schemas.microsoft.com/office/drawing/2014/main" id="{FA430702-D527-F278-A5B1-AE0276F66B14}"/>
+              </a:ext>
+            </a:extLst>
+          </p:cNvPr>
+          <p:cNvCxnSpPr>
+            <a:cxnSpLocks/>
+            <a:endCxn id="97" idx="0"/>
+          </p:cNvCxnSpPr>
+          <p:nvPr/>
+        </p:nvCxnSpPr>
+        <p:spPr>
+          <a:xfrm>
+            <a:off x="13568194" y="11133490"/>
+            <a:ext cx="0" cy="438348"/>
+          </a:xfrm>
+          <a:prstGeom prst="straightConnector1">
+            <a:avLst/>
+          </a:prstGeom>
+          <a:ln w="38100">
+            <a:prstDash val="sysDot"/>
+            <a:tailEnd type="arrow"/>
+          </a:ln>
+        </p:spPr>
+        <p:style>
+          <a:lnRef idx="2">
+            <a:schemeClr val="dk1"/>
+          </a:lnRef>
+          <a:fillRef idx="0">
+            <a:schemeClr val="dk1"/>
+          </a:fillRef>
+          <a:effectRef idx="1">
+            <a:schemeClr val="dk1"/>
+          </a:effectRef>
+          <a:fontRef idx="minor">
+            <a:schemeClr val="tx1"/>
+          </a:fontRef>
+        </p:style>
+      </p:cxnSp>
+      <p:cxnSp>
+        <p:nvCxnSpPr>
+          <p:cNvPr id="102" name="Elbow Connector 71">
+            <a:extLst>
+              <a:ext uri="{FF2B5EF4-FFF2-40B4-BE49-F238E27FC236}">
+                <a16:creationId xmlns:a16="http://schemas.microsoft.com/office/drawing/2014/main" id="{7579687C-76A5-E901-F959-5F4099FFC5FC}"/>
+              </a:ext>
+            </a:extLst>
+          </p:cNvPr>
+          <p:cNvCxnSpPr>
+            <a:cxnSpLocks/>
+          </p:cNvCxnSpPr>
+          <p:nvPr/>
+        </p:nvCxnSpPr>
+        <p:spPr>
+          <a:xfrm>
+            <a:off x="14693589" y="11133490"/>
+            <a:ext cx="0" cy="2394125"/>
+          </a:xfrm>
+          <a:prstGeom prst="straightConnector1">
+            <a:avLst/>
+          </a:prstGeom>
+          <a:ln w="38100">
+            <a:prstDash val="sysDot"/>
+            <a:tailEnd type="arrow"/>
+          </a:ln>
+        </p:spPr>
+        <p:style>
+          <a:lnRef idx="2">
+            <a:schemeClr val="dk1"/>
+          </a:lnRef>
+          <a:fillRef idx="0">
+            <a:schemeClr val="dk1"/>
+          </a:fillRef>
+          <a:effectRef idx="1">
+            <a:schemeClr val="dk1"/>
+          </a:effectRef>
+          <a:fontRef idx="minor">
+            <a:schemeClr val="tx1"/>
+          </a:fontRef>
+        </p:style>
+      </p:cxnSp>
+      <p:cxnSp>
+        <p:nvCxnSpPr>
+          <p:cNvPr id="103" name="Elbow Connector 72">
+            <a:extLst>
+              <a:ext uri="{FF2B5EF4-FFF2-40B4-BE49-F238E27FC236}">
+                <a16:creationId xmlns:a16="http://schemas.microsoft.com/office/drawing/2014/main" id="{1EE64258-6F8C-253F-D568-9EDE4AAFBD0F}"/>
+              </a:ext>
+            </a:extLst>
+          </p:cNvPr>
+          <p:cNvCxnSpPr>
+            <a:cxnSpLocks/>
+            <a:stCxn id="95" idx="2"/>
+          </p:cNvCxnSpPr>
+          <p:nvPr/>
+        </p:nvCxnSpPr>
+        <p:spPr>
+          <a:xfrm>
+            <a:off x="13598748" y="7332307"/>
+            <a:ext cx="10472" cy="467457"/>
+          </a:xfrm>
+          <a:prstGeom prst="straightConnector1">
+            <a:avLst/>
+          </a:prstGeom>
+          <a:ln w="38100">
+            <a:prstDash val="sysDot"/>
+            <a:tailEnd type="arrow"/>
+          </a:ln>
+        </p:spPr>
+        <p:style>
+          <a:lnRef idx="2">
+            <a:schemeClr val="dk1"/>
+          </a:lnRef>
+          <a:fillRef idx="0">
+            <a:schemeClr val="dk1"/>
+          </a:fillRef>
+          <a:effectRef idx="1">
+            <a:schemeClr val="dk1"/>
+          </a:effectRef>
+          <a:fontRef idx="minor">
+            <a:schemeClr val="tx1"/>
+          </a:fontRef>
+        </p:style>
+      </p:cxnSp>
+      <p:cxnSp>
+        <p:nvCxnSpPr>
+          <p:cNvPr id="104" name="Elbow Connector 73">
+            <a:extLst>
+              <a:ext uri="{FF2B5EF4-FFF2-40B4-BE49-F238E27FC236}">
+                <a16:creationId xmlns:a16="http://schemas.microsoft.com/office/drawing/2014/main" id="{0974826F-B771-EA61-100B-06A5BF88F276}"/>
+              </a:ext>
+            </a:extLst>
+          </p:cNvPr>
+          <p:cNvCxnSpPr>
+            <a:cxnSpLocks/>
+            <a:stCxn id="97" idx="2"/>
+          </p:cNvCxnSpPr>
+          <p:nvPr/>
+        </p:nvCxnSpPr>
+        <p:spPr>
+          <a:xfrm>
+            <a:off x="13568194" y="13060160"/>
+            <a:ext cx="0" cy="467455"/>
+          </a:xfrm>
+          <a:prstGeom prst="straightConnector1">
+            <a:avLst/>
+          </a:prstGeom>
+          <a:ln w="38100">
+            <a:prstDash val="sysDot"/>
+            <a:tailEnd type="arrow"/>
+          </a:ln>
+        </p:spPr>
+        <p:style>
+          <a:lnRef idx="2">
+            <a:schemeClr val="dk1"/>
+          </a:lnRef>
+          <a:fillRef idx="0">
+            <a:schemeClr val="dk1"/>
+          </a:fillRef>
+          <a:effectRef idx="1">
+            <a:schemeClr val="dk1"/>
+          </a:effectRef>
+          <a:fontRef idx="minor">
+            <a:schemeClr val="tx1"/>
+          </a:fontRef>
+        </p:style>
+      </p:cxnSp>
+      <p:sp>
+        <p:nvSpPr>
+          <p:cNvPr id="105" name="Rounded Rectangle 104">
+            <a:extLst>
+              <a:ext uri="{FF2B5EF4-FFF2-40B4-BE49-F238E27FC236}">
+                <a16:creationId xmlns:a16="http://schemas.microsoft.com/office/drawing/2014/main" id="{B79346E6-1181-BA48-5803-1D0E172354E3}"/>
+              </a:ext>
+            </a:extLst>
+          </p:cNvPr>
+          <p:cNvSpPr/>
+          <p:nvPr/>
+        </p:nvSpPr>
+        <p:spPr>
+          <a:xfrm>
+            <a:off x="12295474" y="7799764"/>
+            <a:ext cx="3469995" cy="713762"/>
+          </a:xfrm>
+          <a:prstGeom prst="roundRect">
+            <a:avLst/>
+          </a:prstGeom>
+          <a:noFill/>
+          <a:ln>
+            <a:solidFill>
+              <a:schemeClr val="accent1">
+                <a:lumMod val="75000"/>
+              </a:schemeClr>
+            </a:solidFill>
+          </a:ln>
+        </p:spPr>
+        <p:style>
+          <a:lnRef idx="2">
+            <a:schemeClr val="accent1">
+              <a:shade val="15000"/>
+            </a:schemeClr>
+          </a:lnRef>
+          <a:fillRef idx="1">
+            <a:schemeClr val="accent1"/>
+          </a:fillRef>
+          <a:effectRef idx="0">
+            <a:schemeClr val="accent1"/>
+          </a:effectRef>
+          <a:fontRef idx="minor">
+            <a:schemeClr val="lt1"/>
+          </a:fontRef>
+        </p:style>
+        <p:txBody>
+          <a:bodyPr rtlCol="0" anchor="ctr"/>
+          <a:lstStyle/>
+          <a:p>
+            <a:pPr algn="ctr"/>
+            <a:r>
+              <a:rPr lang="en-US" sz="2400" dirty="0">
+                <a:solidFill>
+                  <a:schemeClr val="tx1"/>
+                </a:solidFill>
+              </a:rPr>
+              <a:t>Analyze Content Header</a:t>
+            </a:r>
+          </a:p>
+        </p:txBody>
+      </p:sp>
+      <p:sp>
+        <p:nvSpPr>
+          <p:cNvPr id="106" name="Rounded Rectangle 105">
+            <a:extLst>
+              <a:ext uri="{FF2B5EF4-FFF2-40B4-BE49-F238E27FC236}">
+                <a16:creationId xmlns:a16="http://schemas.microsoft.com/office/drawing/2014/main" id="{B6E3D166-DBC5-6B81-AF15-7DBEAE30F5CE}"/>
+              </a:ext>
+            </a:extLst>
+          </p:cNvPr>
+          <p:cNvSpPr/>
+          <p:nvPr/>
+        </p:nvSpPr>
+        <p:spPr>
+          <a:xfrm>
+            <a:off x="12549991" y="8980983"/>
+            <a:ext cx="2960960" cy="942179"/>
+          </a:xfrm>
+          <a:prstGeom prst="roundRect">
+            <a:avLst/>
+          </a:prstGeom>
+          <a:noFill/>
+          <a:ln>
+            <a:solidFill>
+              <a:schemeClr val="accent1">
+                <a:lumMod val="75000"/>
+              </a:schemeClr>
+            </a:solidFill>
+          </a:ln>
+        </p:spPr>
+        <p:style>
+          <a:lnRef idx="2">
+            <a:schemeClr val="accent1">
+              <a:shade val="15000"/>
+            </a:schemeClr>
+          </a:lnRef>
+          <a:fillRef idx="1">
+            <a:schemeClr val="accent1"/>
+          </a:fillRef>
+          <a:effectRef idx="0">
+            <a:schemeClr val="accent1"/>
+          </a:effectRef>
+          <a:fontRef idx="minor">
+            <a:schemeClr val="lt1"/>
+          </a:fontRef>
+        </p:style>
+        <p:txBody>
+          <a:bodyPr rtlCol="0" anchor="ctr"/>
+          <a:lstStyle/>
+          <a:p>
+            <a:pPr algn="ctr"/>
+            <a:r>
+              <a:rPr lang="en-US" sz="2400" dirty="0">
+                <a:solidFill>
+                  <a:schemeClr val="tx1"/>
+                </a:solidFill>
+              </a:rPr>
+              <a:t>Gather Context from Documents</a:t>
+            </a:r>
+          </a:p>
+        </p:txBody>
+      </p:sp>
+      <p:cxnSp>
+        <p:nvCxnSpPr>
+          <p:cNvPr id="109" name="Elbow Connector 72">
+            <a:extLst>
+              <a:ext uri="{FF2B5EF4-FFF2-40B4-BE49-F238E27FC236}">
+                <a16:creationId xmlns:a16="http://schemas.microsoft.com/office/drawing/2014/main" id="{CA1E1F10-BC39-2712-CBD8-3842F3C77E12}"/>
+              </a:ext>
+            </a:extLst>
+          </p:cNvPr>
+          <p:cNvCxnSpPr>
+            <a:cxnSpLocks/>
+            <a:stCxn id="105" idx="2"/>
+            <a:endCxn id="106" idx="0"/>
+          </p:cNvCxnSpPr>
+          <p:nvPr/>
+        </p:nvCxnSpPr>
+        <p:spPr>
+          <a:xfrm flipH="1">
+            <a:off x="14030471" y="8513526"/>
+            <a:ext cx="1" cy="467457"/>
+          </a:xfrm>
+          <a:prstGeom prst="straightConnector1">
+            <a:avLst/>
+          </a:prstGeom>
+          <a:ln w="38100">
+            <a:prstDash val="sysDot"/>
+            <a:tailEnd type="arrow"/>
+          </a:ln>
+        </p:spPr>
+        <p:style>
+          <a:lnRef idx="2">
+            <a:schemeClr val="dk1"/>
+          </a:lnRef>
+          <a:fillRef idx="0">
+            <a:schemeClr val="dk1"/>
+          </a:fillRef>
+          <a:effectRef idx="1">
+            <a:schemeClr val="dk1"/>
+          </a:effectRef>
+          <a:fontRef idx="minor">
+            <a:schemeClr val="tx1"/>
+          </a:fontRef>
+        </p:style>
+      </p:cxnSp>
+      <p:cxnSp>
+        <p:nvCxnSpPr>
+          <p:cNvPr id="112" name="Elbow Connector 72">
+            <a:extLst>
+              <a:ext uri="{FF2B5EF4-FFF2-40B4-BE49-F238E27FC236}">
+                <a16:creationId xmlns:a16="http://schemas.microsoft.com/office/drawing/2014/main" id="{46B4C744-77F2-4A80-281A-2CE132AE4040}"/>
+              </a:ext>
+            </a:extLst>
+          </p:cNvPr>
+          <p:cNvCxnSpPr>
+            <a:cxnSpLocks/>
+            <a:stCxn id="106" idx="2"/>
+            <a:endCxn id="96" idx="0"/>
+          </p:cNvCxnSpPr>
+          <p:nvPr/>
+        </p:nvCxnSpPr>
+        <p:spPr>
+          <a:xfrm>
+            <a:off x="14030471" y="9923162"/>
+            <a:ext cx="0" cy="467457"/>
+          </a:xfrm>
+          <a:prstGeom prst="straightConnector1">
+            <a:avLst/>
+          </a:prstGeom>
+          <a:ln w="38100">
+            <a:prstDash val="sysDot"/>
+            <a:tailEnd type="arrow"/>
+          </a:ln>
+        </p:spPr>
+        <p:style>
+          <a:lnRef idx="2">
+            <a:schemeClr val="dk1"/>
+          </a:lnRef>
+          <a:fillRef idx="0">
+            <a:schemeClr val="dk1"/>
+          </a:fillRef>
+          <a:effectRef idx="1">
+            <a:schemeClr val="dk1"/>
+          </a:effectRef>
+          <a:fontRef idx="minor">
+            <a:schemeClr val="tx1"/>
+          </a:fontRef>
+        </p:style>
+      </p:cxnSp>
+      <p:sp>
+        <p:nvSpPr>
+          <p:cNvPr id="116" name="Rounded Rectangle 115">
+            <a:extLst>
+              <a:ext uri="{FF2B5EF4-FFF2-40B4-BE49-F238E27FC236}">
+                <a16:creationId xmlns:a16="http://schemas.microsoft.com/office/drawing/2014/main" id="{F8A622A8-F3D7-F991-137F-DCEA6C051FB4}"/>
+              </a:ext>
+            </a:extLst>
+          </p:cNvPr>
+          <p:cNvSpPr/>
+          <p:nvPr/>
+        </p:nvSpPr>
+        <p:spPr>
+          <a:xfrm>
+            <a:off x="17294973" y="4679204"/>
+            <a:ext cx="1862338" cy="713762"/>
+          </a:xfrm>
+          <a:prstGeom prst="roundRect">
+            <a:avLst/>
+          </a:prstGeom>
+          <a:noFill/>
+          <a:ln>
+            <a:solidFill>
+              <a:schemeClr val="accent1">
+                <a:lumMod val="75000"/>
+              </a:schemeClr>
+            </a:solidFill>
+          </a:ln>
+        </p:spPr>
+        <p:style>
+          <a:lnRef idx="2">
+            <a:schemeClr val="accent1">
+              <a:shade val="15000"/>
+            </a:schemeClr>
+          </a:lnRef>
+          <a:fillRef idx="1">
+            <a:schemeClr val="accent1"/>
+          </a:fillRef>
+          <a:effectRef idx="0">
+            <a:schemeClr val="accent1"/>
+          </a:effectRef>
+          <a:fontRef idx="minor">
+            <a:schemeClr val="lt1"/>
+          </a:fontRef>
+        </p:style>
+        <p:txBody>
+          <a:bodyPr rtlCol="0" anchor="ctr"/>
+          <a:lstStyle/>
+          <a:p>
+            <a:pPr algn="ctr"/>
+            <a:r>
+              <a:rPr lang="en-US" sz="2400" dirty="0">
+                <a:solidFill>
+                  <a:schemeClr val="tx1"/>
+                </a:solidFill>
+              </a:rPr>
+              <a:t>Start</a:t>
+            </a:r>
+          </a:p>
+        </p:txBody>
+      </p:sp>
+      <p:sp>
+        <p:nvSpPr>
+          <p:cNvPr id="117" name="Rounded Rectangle 116">
+            <a:extLst>
+              <a:ext uri="{FF2B5EF4-FFF2-40B4-BE49-F238E27FC236}">
+                <a16:creationId xmlns:a16="http://schemas.microsoft.com/office/drawing/2014/main" id="{E74FD21E-9D29-D1FF-3B82-87DD41DAE429}"/>
+              </a:ext>
+            </a:extLst>
+          </p:cNvPr>
+          <p:cNvSpPr/>
+          <p:nvPr/>
+        </p:nvSpPr>
+        <p:spPr>
+          <a:xfrm>
+            <a:off x="16789812" y="5860423"/>
+            <a:ext cx="1862338" cy="1490472"/>
+          </a:xfrm>
+          <a:prstGeom prst="roundRect">
+            <a:avLst/>
+          </a:prstGeom>
+          <a:noFill/>
+          <a:ln>
+            <a:solidFill>
+              <a:schemeClr val="accent1">
+                <a:lumMod val="75000"/>
+              </a:schemeClr>
+            </a:solidFill>
+          </a:ln>
+        </p:spPr>
+        <p:style>
+          <a:lnRef idx="2">
+            <a:schemeClr val="accent1">
+              <a:shade val="15000"/>
+            </a:schemeClr>
+          </a:lnRef>
+          <a:fillRef idx="1">
+            <a:schemeClr val="accent1"/>
+          </a:fillRef>
+          <a:effectRef idx="0">
+            <a:schemeClr val="accent1"/>
+          </a:effectRef>
+          <a:fontRef idx="minor">
+            <a:schemeClr val="lt1"/>
+          </a:fontRef>
+        </p:style>
+        <p:txBody>
+          <a:bodyPr rtlCol="0" anchor="ctr"/>
+          <a:lstStyle/>
+          <a:p>
+            <a:pPr algn="ctr"/>
+            <a:r>
+              <a:rPr lang="en-US" sz="2400" dirty="0">
+                <a:solidFill>
+                  <a:schemeClr val="tx1"/>
+                </a:solidFill>
+              </a:rPr>
+              <a:t>Summarize Previous Content</a:t>
+            </a:r>
+          </a:p>
+        </p:txBody>
+      </p:sp>
+      <p:sp>
+        <p:nvSpPr>
+          <p:cNvPr id="118" name="Rounded Rectangle 117">
+            <a:extLst>
+              <a:ext uri="{FF2B5EF4-FFF2-40B4-BE49-F238E27FC236}">
+                <a16:creationId xmlns:a16="http://schemas.microsoft.com/office/drawing/2014/main" id="{65E5BF8F-45A7-5D9D-1282-26CA50A6B68C}"/>
+              </a:ext>
+            </a:extLst>
+          </p:cNvPr>
+          <p:cNvSpPr/>
+          <p:nvPr/>
+        </p:nvSpPr>
+        <p:spPr>
+          <a:xfrm>
+            <a:off x="16715464" y="11524323"/>
+            <a:ext cx="2960960" cy="713762"/>
+          </a:xfrm>
+          <a:prstGeom prst="roundRect">
+            <a:avLst/>
+          </a:prstGeom>
+          <a:noFill/>
+          <a:ln>
+            <a:solidFill>
+              <a:schemeClr val="accent1">
+                <a:lumMod val="75000"/>
+              </a:schemeClr>
+            </a:solidFill>
+          </a:ln>
+        </p:spPr>
+        <p:style>
+          <a:lnRef idx="2">
+            <a:schemeClr val="accent1">
+              <a:shade val="15000"/>
+            </a:schemeClr>
+          </a:lnRef>
+          <a:fillRef idx="1">
+            <a:schemeClr val="accent1"/>
+          </a:fillRef>
+          <a:effectRef idx="0">
+            <a:schemeClr val="accent1"/>
+          </a:effectRef>
+          <a:fontRef idx="minor">
+            <a:schemeClr val="lt1"/>
+          </a:fontRef>
+        </p:style>
+        <p:txBody>
+          <a:bodyPr rtlCol="0" anchor="ctr"/>
+          <a:lstStyle/>
+          <a:p>
+            <a:pPr algn="ctr"/>
+            <a:r>
+              <a:rPr lang="en-US" sz="2400" dirty="0">
+                <a:solidFill>
+                  <a:schemeClr val="tx1"/>
+                </a:solidFill>
+              </a:rPr>
+              <a:t>Generate Content</a:t>
+            </a:r>
+          </a:p>
+        </p:txBody>
+      </p:sp>
+      <p:sp>
+        <p:nvSpPr>
+          <p:cNvPr id="119" name="Rounded Rectangle 118">
+            <a:extLst>
+              <a:ext uri="{FF2B5EF4-FFF2-40B4-BE49-F238E27FC236}">
+                <a16:creationId xmlns:a16="http://schemas.microsoft.com/office/drawing/2014/main" id="{4FC5375E-21BE-8B79-8871-4E1D89F1B53C}"/>
+              </a:ext>
+            </a:extLst>
+          </p:cNvPr>
+          <p:cNvSpPr/>
+          <p:nvPr/>
+        </p:nvSpPr>
+        <p:spPr>
+          <a:xfrm>
+            <a:off x="16759258" y="12705542"/>
+            <a:ext cx="1862338" cy="1488322"/>
+          </a:xfrm>
+          <a:prstGeom prst="roundRect">
+            <a:avLst/>
+          </a:prstGeom>
+          <a:noFill/>
+          <a:ln>
+            <a:solidFill>
+              <a:schemeClr val="accent1">
+                <a:lumMod val="75000"/>
+              </a:schemeClr>
+            </a:solidFill>
+          </a:ln>
+        </p:spPr>
+        <p:style>
+          <a:lnRef idx="2">
+            <a:schemeClr val="accent1">
+              <a:shade val="15000"/>
+            </a:schemeClr>
+          </a:lnRef>
+          <a:fillRef idx="1">
+            <a:schemeClr val="accent1"/>
+          </a:fillRef>
+          <a:effectRef idx="0">
+            <a:schemeClr val="accent1"/>
+          </a:effectRef>
+          <a:fontRef idx="minor">
+            <a:schemeClr val="lt1"/>
+          </a:fontRef>
+        </p:style>
+        <p:txBody>
+          <a:bodyPr rtlCol="0" anchor="ctr"/>
+          <a:lstStyle/>
+          <a:p>
+            <a:pPr algn="ctr"/>
+            <a:r>
+              <a:rPr lang="en-US" sz="2400" dirty="0">
+                <a:solidFill>
+                  <a:schemeClr val="tx1"/>
+                </a:solidFill>
+              </a:rPr>
+              <a:t>Summarize Generated Content</a:t>
+            </a:r>
+          </a:p>
+        </p:txBody>
+      </p:sp>
+      <p:sp>
+        <p:nvSpPr>
+          <p:cNvPr id="120" name="Rounded Rectangle 119">
+            <a:extLst>
+              <a:ext uri="{FF2B5EF4-FFF2-40B4-BE49-F238E27FC236}">
+                <a16:creationId xmlns:a16="http://schemas.microsoft.com/office/drawing/2014/main" id="{B9FB77FC-14CE-C402-57A8-4E386A5FFB8B}"/>
+              </a:ext>
+            </a:extLst>
+          </p:cNvPr>
+          <p:cNvSpPr/>
+          <p:nvPr/>
+        </p:nvSpPr>
+        <p:spPr>
+          <a:xfrm>
+            <a:off x="17294973" y="14661319"/>
+            <a:ext cx="1862338" cy="713762"/>
+          </a:xfrm>
+          <a:prstGeom prst="roundRect">
+            <a:avLst/>
+          </a:prstGeom>
+          <a:noFill/>
+          <a:ln>
+            <a:solidFill>
+              <a:schemeClr val="accent1">
+                <a:lumMod val="75000"/>
+              </a:schemeClr>
+            </a:solidFill>
+          </a:ln>
+        </p:spPr>
+        <p:style>
+          <a:lnRef idx="2">
+            <a:schemeClr val="accent1">
+              <a:shade val="15000"/>
+            </a:schemeClr>
+          </a:lnRef>
+          <a:fillRef idx="1">
+            <a:schemeClr val="accent1"/>
+          </a:fillRef>
+          <a:effectRef idx="0">
+            <a:schemeClr val="accent1"/>
+          </a:effectRef>
+          <a:fontRef idx="minor">
+            <a:schemeClr val="lt1"/>
+          </a:fontRef>
+        </p:style>
+        <p:txBody>
+          <a:bodyPr rtlCol="0" anchor="ctr"/>
+          <a:lstStyle/>
+          <a:p>
+            <a:pPr algn="ctr"/>
+            <a:r>
+              <a:rPr lang="en-US" sz="2400" dirty="0">
+                <a:solidFill>
+                  <a:schemeClr val="tx1"/>
+                </a:solidFill>
+              </a:rPr>
+              <a:t>End</a:t>
+            </a:r>
+          </a:p>
+        </p:txBody>
+      </p:sp>
+      <p:cxnSp>
+        <p:nvCxnSpPr>
+          <p:cNvPr id="121" name="Elbow Connector 11">
+            <a:extLst>
+              <a:ext uri="{FF2B5EF4-FFF2-40B4-BE49-F238E27FC236}">
+                <a16:creationId xmlns:a16="http://schemas.microsoft.com/office/drawing/2014/main" id="{83138750-37B2-19C8-4302-DB387491CB60}"/>
+              </a:ext>
+            </a:extLst>
+          </p:cNvPr>
+          <p:cNvCxnSpPr>
+            <a:cxnSpLocks/>
+            <a:endCxn id="117" idx="0"/>
+          </p:cNvCxnSpPr>
+          <p:nvPr/>
+        </p:nvCxnSpPr>
+        <p:spPr>
+          <a:xfrm flipH="1">
+            <a:off x="17720981" y="5448106"/>
+            <a:ext cx="10472" cy="412317"/>
+          </a:xfrm>
+          <a:prstGeom prst="straightConnector1">
+            <a:avLst/>
+          </a:prstGeom>
+          <a:ln w="38100">
+            <a:prstDash val="sysDot"/>
+            <a:tailEnd type="arrow"/>
+          </a:ln>
+        </p:spPr>
+        <p:style>
+          <a:lnRef idx="2">
+            <a:schemeClr val="dk1"/>
+          </a:lnRef>
+          <a:fillRef idx="0">
+            <a:schemeClr val="dk1"/>
+          </a:fillRef>
+          <a:effectRef idx="1">
+            <a:schemeClr val="dk1"/>
+          </a:effectRef>
+          <a:fontRef idx="minor">
+            <a:schemeClr val="tx1"/>
+          </a:fontRef>
+        </p:style>
+      </p:cxnSp>
+      <p:cxnSp>
+        <p:nvCxnSpPr>
+          <p:cNvPr id="122" name="Elbow Connector 67">
+            <a:extLst>
+              <a:ext uri="{FF2B5EF4-FFF2-40B4-BE49-F238E27FC236}">
+                <a16:creationId xmlns:a16="http://schemas.microsoft.com/office/drawing/2014/main" id="{4C15DA1F-8AD9-4999-8F7F-2D858E474AA0}"/>
+              </a:ext>
+            </a:extLst>
+          </p:cNvPr>
+          <p:cNvCxnSpPr>
+            <a:cxnSpLocks/>
+          </p:cNvCxnSpPr>
+          <p:nvPr/>
+        </p:nvCxnSpPr>
+        <p:spPr>
+          <a:xfrm>
+            <a:off x="18793631" y="5392966"/>
+            <a:ext cx="0" cy="2423234"/>
+          </a:xfrm>
+          <a:prstGeom prst="straightConnector1">
+            <a:avLst/>
+          </a:prstGeom>
+          <a:ln w="38100">
+            <a:prstDash val="sysDot"/>
+            <a:tailEnd type="arrow"/>
+          </a:ln>
+        </p:spPr>
+        <p:style>
+          <a:lnRef idx="2">
+            <a:schemeClr val="dk1"/>
+          </a:lnRef>
+          <a:fillRef idx="0">
+            <a:schemeClr val="dk1"/>
+          </a:fillRef>
+          <a:effectRef idx="1">
+            <a:schemeClr val="dk1"/>
+          </a:effectRef>
+          <a:fontRef idx="minor">
+            <a:schemeClr val="tx1"/>
+          </a:fontRef>
+        </p:style>
+      </p:cxnSp>
+      <p:cxnSp>
+        <p:nvCxnSpPr>
+          <p:cNvPr id="123" name="Elbow Connector 70">
+            <a:extLst>
+              <a:ext uri="{FF2B5EF4-FFF2-40B4-BE49-F238E27FC236}">
+                <a16:creationId xmlns:a16="http://schemas.microsoft.com/office/drawing/2014/main" id="{4033908A-5A67-DFAE-0F23-B34CAF1233CA}"/>
+              </a:ext>
+            </a:extLst>
+          </p:cNvPr>
+          <p:cNvCxnSpPr>
+            <a:cxnSpLocks/>
+            <a:endCxn id="119" idx="0"/>
+          </p:cNvCxnSpPr>
+          <p:nvPr/>
+        </p:nvCxnSpPr>
+        <p:spPr>
+          <a:xfrm>
+            <a:off x="17690427" y="12267194"/>
+            <a:ext cx="0" cy="438348"/>
+          </a:xfrm>
+          <a:prstGeom prst="straightConnector1">
+            <a:avLst/>
+          </a:prstGeom>
+          <a:ln w="38100">
+            <a:prstDash val="sysDot"/>
+            <a:tailEnd type="arrow"/>
+          </a:ln>
+        </p:spPr>
+        <p:style>
+          <a:lnRef idx="2">
+            <a:schemeClr val="dk1"/>
+          </a:lnRef>
+          <a:fillRef idx="0">
+            <a:schemeClr val="dk1"/>
+          </a:fillRef>
+          <a:effectRef idx="1">
+            <a:schemeClr val="dk1"/>
+          </a:effectRef>
+          <a:fontRef idx="minor">
+            <a:schemeClr val="tx1"/>
+          </a:fontRef>
+        </p:style>
+      </p:cxnSp>
+      <p:cxnSp>
+        <p:nvCxnSpPr>
+          <p:cNvPr id="124" name="Elbow Connector 71">
+            <a:extLst>
+              <a:ext uri="{FF2B5EF4-FFF2-40B4-BE49-F238E27FC236}">
+                <a16:creationId xmlns:a16="http://schemas.microsoft.com/office/drawing/2014/main" id="{769D44AE-7032-2115-A295-6207F3D4D008}"/>
+              </a:ext>
+            </a:extLst>
+          </p:cNvPr>
+          <p:cNvCxnSpPr>
+            <a:cxnSpLocks/>
+          </p:cNvCxnSpPr>
+          <p:nvPr/>
+        </p:nvCxnSpPr>
+        <p:spPr>
+          <a:xfrm>
+            <a:off x="18815822" y="12267194"/>
+            <a:ext cx="0" cy="2394125"/>
+          </a:xfrm>
+          <a:prstGeom prst="straightConnector1">
+            <a:avLst/>
+          </a:prstGeom>
+          <a:ln w="38100">
+            <a:prstDash val="sysDot"/>
+            <a:tailEnd type="arrow"/>
+          </a:ln>
+        </p:spPr>
+        <p:style>
+          <a:lnRef idx="2">
+            <a:schemeClr val="dk1"/>
+          </a:lnRef>
+          <a:fillRef idx="0">
+            <a:schemeClr val="dk1"/>
+          </a:fillRef>
+          <a:effectRef idx="1">
+            <a:schemeClr val="dk1"/>
+          </a:effectRef>
+          <a:fontRef idx="minor">
+            <a:schemeClr val="tx1"/>
+          </a:fontRef>
+        </p:style>
+      </p:cxnSp>
+      <p:cxnSp>
+        <p:nvCxnSpPr>
+          <p:cNvPr id="125" name="Elbow Connector 72">
+            <a:extLst>
+              <a:ext uri="{FF2B5EF4-FFF2-40B4-BE49-F238E27FC236}">
+                <a16:creationId xmlns:a16="http://schemas.microsoft.com/office/drawing/2014/main" id="{2A7EC457-5C54-926A-72F2-864403DDC361}"/>
+              </a:ext>
+            </a:extLst>
+          </p:cNvPr>
+          <p:cNvCxnSpPr>
+            <a:cxnSpLocks/>
+            <a:stCxn id="117" idx="2"/>
+          </p:cNvCxnSpPr>
+          <p:nvPr/>
+        </p:nvCxnSpPr>
+        <p:spPr>
+          <a:xfrm>
+            <a:off x="17720981" y="7350895"/>
+            <a:ext cx="10472" cy="467457"/>
+          </a:xfrm>
+          <a:prstGeom prst="straightConnector1">
+            <a:avLst/>
+          </a:prstGeom>
+          <a:ln w="38100">
+            <a:prstDash val="sysDot"/>
+            <a:tailEnd type="arrow"/>
+          </a:ln>
+        </p:spPr>
+        <p:style>
+          <a:lnRef idx="2">
+            <a:schemeClr val="dk1"/>
+          </a:lnRef>
+          <a:fillRef idx="0">
+            <a:schemeClr val="dk1"/>
+          </a:fillRef>
+          <a:effectRef idx="1">
+            <a:schemeClr val="dk1"/>
+          </a:effectRef>
+          <a:fontRef idx="minor">
+            <a:schemeClr val="tx1"/>
+          </a:fontRef>
+        </p:style>
+      </p:cxnSp>
+      <p:cxnSp>
+        <p:nvCxnSpPr>
+          <p:cNvPr id="126" name="Elbow Connector 73">
+            <a:extLst>
+              <a:ext uri="{FF2B5EF4-FFF2-40B4-BE49-F238E27FC236}">
+                <a16:creationId xmlns:a16="http://schemas.microsoft.com/office/drawing/2014/main" id="{AA8EC410-F885-C830-EC67-6DD067CBBA58}"/>
+              </a:ext>
+            </a:extLst>
+          </p:cNvPr>
+          <p:cNvCxnSpPr>
+            <a:cxnSpLocks/>
+            <a:stCxn id="119" idx="2"/>
+          </p:cNvCxnSpPr>
+          <p:nvPr/>
+        </p:nvCxnSpPr>
+        <p:spPr>
+          <a:xfrm>
+            <a:off x="17690427" y="14193864"/>
+            <a:ext cx="0" cy="467455"/>
+          </a:xfrm>
+          <a:prstGeom prst="straightConnector1">
+            <a:avLst/>
+          </a:prstGeom>
+          <a:ln w="38100">
+            <a:prstDash val="sysDot"/>
+            <a:tailEnd type="arrow"/>
+          </a:ln>
+        </p:spPr>
+        <p:style>
+          <a:lnRef idx="2">
+            <a:schemeClr val="dk1"/>
+          </a:lnRef>
+          <a:fillRef idx="0">
+            <a:schemeClr val="dk1"/>
+          </a:fillRef>
+          <a:effectRef idx="1">
+            <a:schemeClr val="dk1"/>
+          </a:effectRef>
+          <a:fontRef idx="minor">
+            <a:schemeClr val="tx1"/>
+          </a:fontRef>
+        </p:style>
+      </p:cxnSp>
+      <p:sp>
+        <p:nvSpPr>
+          <p:cNvPr id="127" name="Rounded Rectangle 126">
+            <a:extLst>
+              <a:ext uri="{FF2B5EF4-FFF2-40B4-BE49-F238E27FC236}">
+                <a16:creationId xmlns:a16="http://schemas.microsoft.com/office/drawing/2014/main" id="{12FFD788-B7B7-6778-756C-3563144EC039}"/>
+              </a:ext>
+            </a:extLst>
+          </p:cNvPr>
+          <p:cNvSpPr/>
+          <p:nvPr/>
+        </p:nvSpPr>
+        <p:spPr>
+          <a:xfrm>
+            <a:off x="16460947" y="7818352"/>
+            <a:ext cx="3469995" cy="713762"/>
+          </a:xfrm>
+          <a:prstGeom prst="roundRect">
+            <a:avLst/>
+          </a:prstGeom>
+          <a:noFill/>
+          <a:ln>
+            <a:solidFill>
+              <a:schemeClr val="accent1">
+                <a:lumMod val="75000"/>
+              </a:schemeClr>
+            </a:solidFill>
+          </a:ln>
+        </p:spPr>
+        <p:style>
+          <a:lnRef idx="2">
+            <a:schemeClr val="accent1">
+              <a:shade val="15000"/>
+            </a:schemeClr>
+          </a:lnRef>
+          <a:fillRef idx="1">
+            <a:schemeClr val="accent1"/>
+          </a:fillRef>
+          <a:effectRef idx="0">
+            <a:schemeClr val="accent1"/>
+          </a:effectRef>
+          <a:fontRef idx="minor">
+            <a:schemeClr val="lt1"/>
+          </a:fontRef>
+        </p:style>
+        <p:txBody>
+          <a:bodyPr rtlCol="0" anchor="ctr"/>
+          <a:lstStyle/>
+          <a:p>
+            <a:pPr algn="ctr"/>
+            <a:r>
+              <a:rPr lang="en-US" sz="2400" dirty="0">
+                <a:solidFill>
+                  <a:schemeClr val="tx1"/>
+                </a:solidFill>
+              </a:rPr>
+              <a:t>Analyze Content Header</a:t>
+            </a:r>
+          </a:p>
+        </p:txBody>
+      </p:sp>
+      <p:sp>
+        <p:nvSpPr>
+          <p:cNvPr id="128" name="Rounded Rectangle 127">
+            <a:extLst>
+              <a:ext uri="{FF2B5EF4-FFF2-40B4-BE49-F238E27FC236}">
+                <a16:creationId xmlns:a16="http://schemas.microsoft.com/office/drawing/2014/main" id="{B9DE9D4B-C17B-F007-17B2-9AEDD580D675}"/>
+              </a:ext>
+            </a:extLst>
+          </p:cNvPr>
+          <p:cNvSpPr/>
+          <p:nvPr/>
+        </p:nvSpPr>
+        <p:spPr>
+          <a:xfrm>
+            <a:off x="16715464" y="10114687"/>
+            <a:ext cx="2960960" cy="942179"/>
+          </a:xfrm>
+          <a:prstGeom prst="roundRect">
+            <a:avLst/>
+          </a:prstGeom>
+          <a:noFill/>
+          <a:ln>
+            <a:solidFill>
+              <a:schemeClr val="accent1">
+                <a:lumMod val="75000"/>
+              </a:schemeClr>
+            </a:solidFill>
+          </a:ln>
+        </p:spPr>
+        <p:style>
+          <a:lnRef idx="2">
+            <a:schemeClr val="accent1">
+              <a:shade val="15000"/>
+            </a:schemeClr>
+          </a:lnRef>
+          <a:fillRef idx="1">
+            <a:schemeClr val="accent1"/>
+          </a:fillRef>
+          <a:effectRef idx="0">
+            <a:schemeClr val="accent1"/>
+          </a:effectRef>
+          <a:fontRef idx="minor">
+            <a:schemeClr val="lt1"/>
+          </a:fontRef>
+        </p:style>
+        <p:txBody>
+          <a:bodyPr rtlCol="0" anchor="ctr"/>
+          <a:lstStyle/>
+          <a:p>
+            <a:pPr algn="ctr"/>
+            <a:r>
+              <a:rPr lang="en-US" sz="2400" dirty="0">
+                <a:solidFill>
+                  <a:schemeClr val="tx1"/>
+                </a:solidFill>
+              </a:rPr>
+              <a:t>Gather Context from Literature</a:t>
+            </a:r>
+          </a:p>
+        </p:txBody>
+      </p:sp>
+      <p:cxnSp>
+        <p:nvCxnSpPr>
+          <p:cNvPr id="129" name="Elbow Connector 72">
+            <a:extLst>
+              <a:ext uri="{FF2B5EF4-FFF2-40B4-BE49-F238E27FC236}">
+                <a16:creationId xmlns:a16="http://schemas.microsoft.com/office/drawing/2014/main" id="{2EE09999-84E6-F890-51A1-722CD1859C62}"/>
+              </a:ext>
+            </a:extLst>
+          </p:cNvPr>
+          <p:cNvCxnSpPr>
+            <a:cxnSpLocks/>
+            <a:stCxn id="127" idx="2"/>
+            <a:endCxn id="131" idx="0"/>
+          </p:cNvCxnSpPr>
+          <p:nvPr/>
+        </p:nvCxnSpPr>
+        <p:spPr>
+          <a:xfrm>
+            <a:off x="18195945" y="8532114"/>
+            <a:ext cx="0" cy="423309"/>
+          </a:xfrm>
+          <a:prstGeom prst="straightConnector1">
+            <a:avLst/>
+          </a:prstGeom>
+          <a:ln w="38100">
+            <a:prstDash val="sysDot"/>
+            <a:tailEnd type="arrow"/>
+          </a:ln>
+        </p:spPr>
+        <p:style>
+          <a:lnRef idx="2">
+            <a:schemeClr val="dk1"/>
+          </a:lnRef>
+          <a:fillRef idx="0">
+            <a:schemeClr val="dk1"/>
+          </a:fillRef>
+          <a:effectRef idx="1">
+            <a:schemeClr val="dk1"/>
+          </a:effectRef>
+          <a:fontRef idx="minor">
+            <a:schemeClr val="tx1"/>
+          </a:fontRef>
+        </p:style>
+      </p:cxnSp>
+      <p:cxnSp>
+        <p:nvCxnSpPr>
+          <p:cNvPr id="130" name="Elbow Connector 72">
+            <a:extLst>
+              <a:ext uri="{FF2B5EF4-FFF2-40B4-BE49-F238E27FC236}">
+                <a16:creationId xmlns:a16="http://schemas.microsoft.com/office/drawing/2014/main" id="{45834613-DEB9-2BEA-5032-32AE53773490}"/>
+              </a:ext>
+            </a:extLst>
+          </p:cNvPr>
+          <p:cNvCxnSpPr>
+            <a:cxnSpLocks/>
+            <a:stCxn id="128" idx="2"/>
+            <a:endCxn id="118" idx="0"/>
+          </p:cNvCxnSpPr>
+          <p:nvPr/>
+        </p:nvCxnSpPr>
+        <p:spPr>
+          <a:xfrm>
+            <a:off x="18195944" y="11056866"/>
+            <a:ext cx="0" cy="467457"/>
+          </a:xfrm>
+          <a:prstGeom prst="straightConnector1">
+            <a:avLst/>
+          </a:prstGeom>
+          <a:ln w="38100">
+            <a:prstDash val="sysDot"/>
+            <a:tailEnd type="arrow"/>
+          </a:ln>
+        </p:spPr>
+        <p:style>
+          <a:lnRef idx="2">
+            <a:schemeClr val="dk1"/>
+          </a:lnRef>
+          <a:fillRef idx="0">
+            <a:schemeClr val="dk1"/>
+          </a:fillRef>
+          <a:effectRef idx="1">
+            <a:schemeClr val="dk1"/>
+          </a:effectRef>
+          <a:fontRef idx="minor">
+            <a:schemeClr val="tx1"/>
+          </a:fontRef>
+        </p:style>
+      </p:cxnSp>
+      <p:sp>
+        <p:nvSpPr>
+          <p:cNvPr id="131" name="Rounded Rectangle 130">
+            <a:extLst>
+              <a:ext uri="{FF2B5EF4-FFF2-40B4-BE49-F238E27FC236}">
+                <a16:creationId xmlns:a16="http://schemas.microsoft.com/office/drawing/2014/main" id="{ABDD15C3-1807-A17B-2859-76DD15D33902}"/>
+              </a:ext>
+            </a:extLst>
+          </p:cNvPr>
+          <p:cNvSpPr/>
+          <p:nvPr/>
+        </p:nvSpPr>
+        <p:spPr>
+          <a:xfrm>
+            <a:off x="16460947" y="8955423"/>
+            <a:ext cx="3469995" cy="713762"/>
+          </a:xfrm>
+          <a:prstGeom prst="roundRect">
+            <a:avLst/>
+          </a:prstGeom>
+          <a:noFill/>
+          <a:ln>
+            <a:solidFill>
+              <a:schemeClr val="accent1">
+                <a:lumMod val="75000"/>
+              </a:schemeClr>
+            </a:solidFill>
+          </a:ln>
+        </p:spPr>
+        <p:style>
+          <a:lnRef idx="2">
+            <a:schemeClr val="accent1">
+              <a:shade val="15000"/>
+            </a:schemeClr>
+          </a:lnRef>
+          <a:fillRef idx="1">
+            <a:schemeClr val="accent1"/>
+          </a:fillRef>
+          <a:effectRef idx="0">
+            <a:schemeClr val="accent1"/>
+          </a:effectRef>
+          <a:fontRef idx="minor">
+            <a:schemeClr val="lt1"/>
+          </a:fontRef>
+        </p:style>
+        <p:txBody>
+          <a:bodyPr rtlCol="0" anchor="ctr"/>
+          <a:lstStyle/>
+          <a:p>
+            <a:pPr algn="ctr"/>
+            <a:r>
+              <a:rPr lang="en-US" sz="2400" dirty="0">
+                <a:solidFill>
+                  <a:schemeClr val="tx1"/>
+                </a:solidFill>
+              </a:rPr>
+              <a:t>Add Literature</a:t>
+            </a:r>
+          </a:p>
+        </p:txBody>
+      </p:sp>
+      <p:cxnSp>
+        <p:nvCxnSpPr>
+          <p:cNvPr id="133" name="Elbow Connector 72">
+            <a:extLst>
+              <a:ext uri="{FF2B5EF4-FFF2-40B4-BE49-F238E27FC236}">
+                <a16:creationId xmlns:a16="http://schemas.microsoft.com/office/drawing/2014/main" id="{45511834-2B5D-677C-CB8C-7C835DFF287F}"/>
+              </a:ext>
+            </a:extLst>
+          </p:cNvPr>
+          <p:cNvCxnSpPr>
+            <a:cxnSpLocks/>
+            <a:stCxn id="131" idx="2"/>
+            <a:endCxn id="128" idx="0"/>
+          </p:cNvCxnSpPr>
+          <p:nvPr/>
+        </p:nvCxnSpPr>
+        <p:spPr>
+          <a:xfrm flipH="1">
+            <a:off x="18195944" y="9669185"/>
+            <a:ext cx="1" cy="445502"/>
+          </a:xfrm>
+          <a:prstGeom prst="straightConnector1">
+            <a:avLst/>
+          </a:prstGeom>
+          <a:ln w="38100">
+            <a:prstDash val="sysDot"/>
+            <a:tailEnd type="arrow"/>
+          </a:ln>
+        </p:spPr>
+        <p:style>
+          <a:lnRef idx="2">
+            <a:schemeClr val="dk1"/>
+          </a:lnRef>
+          <a:fillRef idx="0">
+            <a:schemeClr val="dk1"/>
+          </a:fillRef>
+          <a:effectRef idx="1">
+            <a:schemeClr val="dk1"/>
+          </a:effectRef>
+          <a:fontRef idx="minor">
+            <a:schemeClr val="tx1"/>
+          </a:fontRef>
+        </p:style>
+      </p:cxnSp>
+      <p:sp>
+        <p:nvSpPr>
+          <p:cNvPr id="136" name="Rounded Rectangle 135">
+            <a:extLst>
+              <a:ext uri="{FF2B5EF4-FFF2-40B4-BE49-F238E27FC236}">
+                <a16:creationId xmlns:a16="http://schemas.microsoft.com/office/drawing/2014/main" id="{968E15A1-F865-8CE1-A2C3-215C3D2ACB95}"/>
+              </a:ext>
+            </a:extLst>
+          </p:cNvPr>
+          <p:cNvSpPr/>
+          <p:nvPr/>
+        </p:nvSpPr>
+        <p:spPr>
+          <a:xfrm>
+            <a:off x="23513628" y="4675487"/>
+            <a:ext cx="1862338" cy="713762"/>
+          </a:xfrm>
+          <a:prstGeom prst="roundRect">
+            <a:avLst/>
+          </a:prstGeom>
+          <a:noFill/>
+          <a:ln>
+            <a:solidFill>
+              <a:schemeClr val="accent1">
+                <a:lumMod val="75000"/>
+              </a:schemeClr>
+            </a:solidFill>
+          </a:ln>
+        </p:spPr>
+        <p:style>
+          <a:lnRef idx="2">
+            <a:schemeClr val="accent1">
+              <a:shade val="15000"/>
+            </a:schemeClr>
+          </a:lnRef>
+          <a:fillRef idx="1">
+            <a:schemeClr val="accent1"/>
+          </a:fillRef>
+          <a:effectRef idx="0">
+            <a:schemeClr val="accent1"/>
+          </a:effectRef>
+          <a:fontRef idx="minor">
+            <a:schemeClr val="lt1"/>
+          </a:fontRef>
+        </p:style>
+        <p:txBody>
+          <a:bodyPr rtlCol="0" anchor="ctr"/>
+          <a:lstStyle/>
+          <a:p>
+            <a:pPr algn="ctr"/>
+            <a:r>
+              <a:rPr lang="en-US" sz="2400" dirty="0">
+                <a:solidFill>
+                  <a:schemeClr val="tx1"/>
+                </a:solidFill>
+              </a:rPr>
+              <a:t>Start</a:t>
+            </a:r>
+          </a:p>
+        </p:txBody>
+      </p:sp>
+      <p:sp>
+        <p:nvSpPr>
+          <p:cNvPr id="137" name="Rounded Rectangle 136">
+            <a:extLst>
+              <a:ext uri="{FF2B5EF4-FFF2-40B4-BE49-F238E27FC236}">
+                <a16:creationId xmlns:a16="http://schemas.microsoft.com/office/drawing/2014/main" id="{45DF87B4-4E04-149A-57C9-9BE3280BEA02}"/>
+              </a:ext>
+            </a:extLst>
+          </p:cNvPr>
+          <p:cNvSpPr/>
+          <p:nvPr/>
+        </p:nvSpPr>
+        <p:spPr>
+          <a:xfrm>
+            <a:off x="23008467" y="5856706"/>
+            <a:ext cx="1862338" cy="1490472"/>
+          </a:xfrm>
+          <a:prstGeom prst="roundRect">
+            <a:avLst/>
+          </a:prstGeom>
+          <a:noFill/>
+          <a:ln>
+            <a:solidFill>
+              <a:schemeClr val="accent1">
+                <a:lumMod val="75000"/>
+              </a:schemeClr>
+            </a:solidFill>
+          </a:ln>
+        </p:spPr>
+        <p:style>
+          <a:lnRef idx="2">
+            <a:schemeClr val="accent1">
+              <a:shade val="15000"/>
+            </a:schemeClr>
+          </a:lnRef>
+          <a:fillRef idx="1">
+            <a:schemeClr val="accent1"/>
+          </a:fillRef>
+          <a:effectRef idx="0">
+            <a:schemeClr val="accent1"/>
+          </a:effectRef>
+          <a:fontRef idx="minor">
+            <a:schemeClr val="lt1"/>
+          </a:fontRef>
+        </p:style>
+        <p:txBody>
+          <a:bodyPr rtlCol="0" anchor="ctr"/>
+          <a:lstStyle/>
+          <a:p>
+            <a:pPr algn="ctr"/>
+            <a:r>
+              <a:rPr lang="en-US" sz="2400" dirty="0">
+                <a:solidFill>
+                  <a:schemeClr val="tx1"/>
+                </a:solidFill>
+              </a:rPr>
+              <a:t>Summarize Previous Content</a:t>
+            </a:r>
+          </a:p>
+        </p:txBody>
+      </p:sp>
+      <p:sp>
+        <p:nvSpPr>
+          <p:cNvPr id="138" name="Rounded Rectangle 137">
+            <a:extLst>
+              <a:ext uri="{FF2B5EF4-FFF2-40B4-BE49-F238E27FC236}">
+                <a16:creationId xmlns:a16="http://schemas.microsoft.com/office/drawing/2014/main" id="{141D978E-3B3E-7CC2-B9A2-F5B63D2236DB}"/>
+              </a:ext>
+            </a:extLst>
+          </p:cNvPr>
+          <p:cNvSpPr/>
+          <p:nvPr/>
+        </p:nvSpPr>
+        <p:spPr>
+          <a:xfrm>
+            <a:off x="22934119" y="11520606"/>
+            <a:ext cx="2960960" cy="713762"/>
+          </a:xfrm>
+          <a:prstGeom prst="roundRect">
+            <a:avLst/>
+          </a:prstGeom>
+          <a:noFill/>
+          <a:ln>
+            <a:solidFill>
+              <a:schemeClr val="accent1">
+                <a:lumMod val="75000"/>
+              </a:schemeClr>
+            </a:solidFill>
+          </a:ln>
+        </p:spPr>
+        <p:style>
+          <a:lnRef idx="2">
+            <a:schemeClr val="accent1">
+              <a:shade val="15000"/>
+            </a:schemeClr>
+          </a:lnRef>
+          <a:fillRef idx="1">
+            <a:schemeClr val="accent1"/>
+          </a:fillRef>
+          <a:effectRef idx="0">
+            <a:schemeClr val="accent1"/>
+          </a:effectRef>
+          <a:fontRef idx="minor">
+            <a:schemeClr val="lt1"/>
+          </a:fontRef>
+        </p:style>
+        <p:txBody>
+          <a:bodyPr rtlCol="0" anchor="ctr"/>
+          <a:lstStyle/>
+          <a:p>
+            <a:pPr algn="ctr"/>
+            <a:r>
+              <a:rPr lang="en-US" sz="2400" dirty="0">
+                <a:solidFill>
+                  <a:schemeClr val="tx1"/>
+                </a:solidFill>
+              </a:rPr>
+              <a:t>Generate Content</a:t>
+            </a:r>
+          </a:p>
+        </p:txBody>
+      </p:sp>
+      <p:sp>
+        <p:nvSpPr>
+          <p:cNvPr id="139" name="Rounded Rectangle 138">
+            <a:extLst>
+              <a:ext uri="{FF2B5EF4-FFF2-40B4-BE49-F238E27FC236}">
+                <a16:creationId xmlns:a16="http://schemas.microsoft.com/office/drawing/2014/main" id="{FC145C31-4F1A-DC99-426C-BF154F977581}"/>
+              </a:ext>
+            </a:extLst>
+          </p:cNvPr>
+          <p:cNvSpPr/>
+          <p:nvPr/>
+        </p:nvSpPr>
+        <p:spPr>
+          <a:xfrm>
+            <a:off x="22977913" y="12701825"/>
+            <a:ext cx="1862338" cy="1488322"/>
+          </a:xfrm>
+          <a:prstGeom prst="roundRect">
+            <a:avLst/>
+          </a:prstGeom>
+          <a:noFill/>
+          <a:ln>
+            <a:solidFill>
+              <a:schemeClr val="accent1">
+                <a:lumMod val="75000"/>
+              </a:schemeClr>
+            </a:solidFill>
+          </a:ln>
+        </p:spPr>
+        <p:style>
+          <a:lnRef idx="2">
+            <a:schemeClr val="accent1">
+              <a:shade val="15000"/>
+            </a:schemeClr>
+          </a:lnRef>
+          <a:fillRef idx="1">
+            <a:schemeClr val="accent1"/>
+          </a:fillRef>
+          <a:effectRef idx="0">
+            <a:schemeClr val="accent1"/>
+          </a:effectRef>
+          <a:fontRef idx="minor">
+            <a:schemeClr val="lt1"/>
+          </a:fontRef>
+        </p:style>
+        <p:txBody>
+          <a:bodyPr rtlCol="0" anchor="ctr"/>
+          <a:lstStyle/>
+          <a:p>
+            <a:pPr algn="ctr"/>
+            <a:r>
+              <a:rPr lang="en-US" sz="2400" dirty="0">
+                <a:solidFill>
+                  <a:schemeClr val="tx1"/>
+                </a:solidFill>
+              </a:rPr>
+              <a:t>Summarize Generated Content</a:t>
+            </a:r>
+          </a:p>
+        </p:txBody>
+      </p:sp>
+      <p:sp>
+        <p:nvSpPr>
+          <p:cNvPr id="140" name="Rounded Rectangle 139">
+            <a:extLst>
+              <a:ext uri="{FF2B5EF4-FFF2-40B4-BE49-F238E27FC236}">
+                <a16:creationId xmlns:a16="http://schemas.microsoft.com/office/drawing/2014/main" id="{9ED77F68-DE2A-163E-301B-4AD2C5E49E1B}"/>
+              </a:ext>
+            </a:extLst>
+          </p:cNvPr>
+          <p:cNvSpPr/>
+          <p:nvPr/>
+        </p:nvSpPr>
+        <p:spPr>
+          <a:xfrm>
+            <a:off x="23513628" y="14657602"/>
+            <a:ext cx="1862338" cy="713762"/>
+          </a:xfrm>
+          <a:prstGeom prst="roundRect">
+            <a:avLst/>
+          </a:prstGeom>
+          <a:noFill/>
+          <a:ln>
+            <a:solidFill>
+              <a:schemeClr val="accent1">
+                <a:lumMod val="75000"/>
+              </a:schemeClr>
+            </a:solidFill>
+          </a:ln>
+        </p:spPr>
+        <p:style>
+          <a:lnRef idx="2">
+            <a:schemeClr val="accent1">
+              <a:shade val="15000"/>
+            </a:schemeClr>
+          </a:lnRef>
+          <a:fillRef idx="1">
+            <a:schemeClr val="accent1"/>
+          </a:fillRef>
+          <a:effectRef idx="0">
+            <a:schemeClr val="accent1"/>
+          </a:effectRef>
+          <a:fontRef idx="minor">
+            <a:schemeClr val="lt1"/>
+          </a:fontRef>
+        </p:style>
+        <p:txBody>
+          <a:bodyPr rtlCol="0" anchor="ctr"/>
+          <a:lstStyle/>
+          <a:p>
+            <a:pPr algn="ctr"/>
+            <a:r>
+              <a:rPr lang="en-US" sz="2400" dirty="0">
+                <a:solidFill>
+                  <a:schemeClr val="tx1"/>
+                </a:solidFill>
+              </a:rPr>
+              <a:t>End</a:t>
+            </a:r>
+          </a:p>
+        </p:txBody>
+      </p:sp>
+      <p:cxnSp>
+        <p:nvCxnSpPr>
+          <p:cNvPr id="141" name="Elbow Connector 11">
+            <a:extLst>
+              <a:ext uri="{FF2B5EF4-FFF2-40B4-BE49-F238E27FC236}">
+                <a16:creationId xmlns:a16="http://schemas.microsoft.com/office/drawing/2014/main" id="{6451C82B-41D6-DE3D-F9C8-2BF8960EC43D}"/>
+              </a:ext>
+            </a:extLst>
+          </p:cNvPr>
+          <p:cNvCxnSpPr>
+            <a:cxnSpLocks/>
+            <a:endCxn id="137" idx="0"/>
+          </p:cNvCxnSpPr>
+          <p:nvPr/>
+        </p:nvCxnSpPr>
+        <p:spPr>
+          <a:xfrm flipH="1">
+            <a:off x="23939636" y="5444389"/>
+            <a:ext cx="10472" cy="412317"/>
+          </a:xfrm>
+          <a:prstGeom prst="straightConnector1">
+            <a:avLst/>
+          </a:prstGeom>
+          <a:ln w="38100">
+            <a:prstDash val="sysDot"/>
+            <a:tailEnd type="arrow"/>
+          </a:ln>
+        </p:spPr>
+        <p:style>
+          <a:lnRef idx="2">
+            <a:schemeClr val="dk1"/>
+          </a:lnRef>
+          <a:fillRef idx="0">
+            <a:schemeClr val="dk1"/>
+          </a:fillRef>
+          <a:effectRef idx="1">
+            <a:schemeClr val="dk1"/>
+          </a:effectRef>
+          <a:fontRef idx="minor">
+            <a:schemeClr val="tx1"/>
+          </a:fontRef>
+        </p:style>
+      </p:cxnSp>
+      <p:cxnSp>
+        <p:nvCxnSpPr>
+          <p:cNvPr id="142" name="Elbow Connector 67">
+            <a:extLst>
+              <a:ext uri="{FF2B5EF4-FFF2-40B4-BE49-F238E27FC236}">
+                <a16:creationId xmlns:a16="http://schemas.microsoft.com/office/drawing/2014/main" id="{F42FFD48-4FA0-D703-7B44-162408E955A0}"/>
+              </a:ext>
+            </a:extLst>
+          </p:cNvPr>
+          <p:cNvCxnSpPr>
+            <a:cxnSpLocks/>
+          </p:cNvCxnSpPr>
+          <p:nvPr/>
+        </p:nvCxnSpPr>
+        <p:spPr>
+          <a:xfrm>
+            <a:off x="25012287" y="5389249"/>
+            <a:ext cx="0" cy="2423234"/>
+          </a:xfrm>
+          <a:prstGeom prst="straightConnector1">
+            <a:avLst/>
+          </a:prstGeom>
+          <a:ln w="38100">
+            <a:prstDash val="sysDot"/>
+            <a:tailEnd type="arrow"/>
+          </a:ln>
+        </p:spPr>
+        <p:style>
+          <a:lnRef idx="2">
+            <a:schemeClr val="dk1"/>
+          </a:lnRef>
+          <a:fillRef idx="0">
+            <a:schemeClr val="dk1"/>
+          </a:fillRef>
+          <a:effectRef idx="1">
+            <a:schemeClr val="dk1"/>
+          </a:effectRef>
+          <a:fontRef idx="minor">
+            <a:schemeClr val="tx1"/>
+          </a:fontRef>
+        </p:style>
+      </p:cxnSp>
+      <p:cxnSp>
+        <p:nvCxnSpPr>
+          <p:cNvPr id="143" name="Elbow Connector 70">
+            <a:extLst>
+              <a:ext uri="{FF2B5EF4-FFF2-40B4-BE49-F238E27FC236}">
+                <a16:creationId xmlns:a16="http://schemas.microsoft.com/office/drawing/2014/main" id="{1A91EDDE-4A99-578F-9608-D939BE14D54F}"/>
+              </a:ext>
+            </a:extLst>
+          </p:cNvPr>
+          <p:cNvCxnSpPr>
+            <a:cxnSpLocks/>
+            <a:endCxn id="139" idx="0"/>
+          </p:cNvCxnSpPr>
+          <p:nvPr/>
+        </p:nvCxnSpPr>
+        <p:spPr>
+          <a:xfrm>
+            <a:off x="23909082" y="12263477"/>
+            <a:ext cx="0" cy="438348"/>
+          </a:xfrm>
+          <a:prstGeom prst="straightConnector1">
+            <a:avLst/>
+          </a:prstGeom>
+          <a:ln w="38100">
+            <a:prstDash val="sysDot"/>
+            <a:tailEnd type="arrow"/>
+          </a:ln>
+        </p:spPr>
+        <p:style>
+          <a:lnRef idx="2">
+            <a:schemeClr val="dk1"/>
+          </a:lnRef>
+          <a:fillRef idx="0">
+            <a:schemeClr val="dk1"/>
+          </a:fillRef>
+          <a:effectRef idx="1">
+            <a:schemeClr val="dk1"/>
+          </a:effectRef>
+          <a:fontRef idx="minor">
+            <a:schemeClr val="tx1"/>
+          </a:fontRef>
+        </p:style>
+      </p:cxnSp>
+      <p:cxnSp>
+        <p:nvCxnSpPr>
+          <p:cNvPr id="144" name="Elbow Connector 71">
+            <a:extLst>
+              <a:ext uri="{FF2B5EF4-FFF2-40B4-BE49-F238E27FC236}">
+                <a16:creationId xmlns:a16="http://schemas.microsoft.com/office/drawing/2014/main" id="{799F3FD4-2A97-4691-2195-B6B84657968B}"/>
+              </a:ext>
+            </a:extLst>
+          </p:cNvPr>
+          <p:cNvCxnSpPr>
+            <a:cxnSpLocks/>
+          </p:cNvCxnSpPr>
+          <p:nvPr/>
+        </p:nvCxnSpPr>
+        <p:spPr>
+          <a:xfrm>
+            <a:off x="25034477" y="12263477"/>
+            <a:ext cx="0" cy="2394125"/>
+          </a:xfrm>
+          <a:prstGeom prst="straightConnector1">
+            <a:avLst/>
+          </a:prstGeom>
+          <a:ln w="38100">
+            <a:prstDash val="sysDot"/>
+            <a:tailEnd type="arrow"/>
+          </a:ln>
+        </p:spPr>
+        <p:style>
+          <a:lnRef idx="2">
+            <a:schemeClr val="dk1"/>
+          </a:lnRef>
+          <a:fillRef idx="0">
+            <a:schemeClr val="dk1"/>
+          </a:fillRef>
+          <a:effectRef idx="1">
+            <a:schemeClr val="dk1"/>
+          </a:effectRef>
+          <a:fontRef idx="minor">
+            <a:schemeClr val="tx1"/>
+          </a:fontRef>
+        </p:style>
+      </p:cxnSp>
+      <p:cxnSp>
+        <p:nvCxnSpPr>
+          <p:cNvPr id="145" name="Elbow Connector 72">
+            <a:extLst>
+              <a:ext uri="{FF2B5EF4-FFF2-40B4-BE49-F238E27FC236}">
+                <a16:creationId xmlns:a16="http://schemas.microsoft.com/office/drawing/2014/main" id="{AD5AA0BB-80BF-AABB-8B59-3475351B7CF9}"/>
+              </a:ext>
+            </a:extLst>
+          </p:cNvPr>
+          <p:cNvCxnSpPr>
+            <a:cxnSpLocks/>
+            <a:stCxn id="137" idx="2"/>
+          </p:cNvCxnSpPr>
+          <p:nvPr/>
+        </p:nvCxnSpPr>
+        <p:spPr>
+          <a:xfrm>
+            <a:off x="23939636" y="7347178"/>
+            <a:ext cx="10472" cy="467457"/>
+          </a:xfrm>
+          <a:prstGeom prst="straightConnector1">
+            <a:avLst/>
+          </a:prstGeom>
+          <a:ln w="38100">
+            <a:prstDash val="sysDot"/>
+            <a:tailEnd type="arrow"/>
+          </a:ln>
+        </p:spPr>
+        <p:style>
+          <a:lnRef idx="2">
+            <a:schemeClr val="dk1"/>
+          </a:lnRef>
+          <a:fillRef idx="0">
+            <a:schemeClr val="dk1"/>
+          </a:fillRef>
+          <a:effectRef idx="1">
+            <a:schemeClr val="dk1"/>
+          </a:effectRef>
+          <a:fontRef idx="minor">
+            <a:schemeClr val="tx1"/>
+          </a:fontRef>
+        </p:style>
+      </p:cxnSp>
+      <p:cxnSp>
+        <p:nvCxnSpPr>
+          <p:cNvPr id="146" name="Elbow Connector 73">
+            <a:extLst>
+              <a:ext uri="{FF2B5EF4-FFF2-40B4-BE49-F238E27FC236}">
+                <a16:creationId xmlns:a16="http://schemas.microsoft.com/office/drawing/2014/main" id="{A0C14453-346B-715C-ED51-19FF6A7C7AEA}"/>
+              </a:ext>
+            </a:extLst>
+          </p:cNvPr>
+          <p:cNvCxnSpPr>
+            <a:cxnSpLocks/>
+            <a:stCxn id="139" idx="2"/>
+          </p:cNvCxnSpPr>
+          <p:nvPr/>
+        </p:nvCxnSpPr>
+        <p:spPr>
+          <a:xfrm>
+            <a:off x="23909082" y="14190147"/>
+            <a:ext cx="0" cy="467455"/>
+          </a:xfrm>
+          <a:prstGeom prst="straightConnector1">
+            <a:avLst/>
+          </a:prstGeom>
+          <a:ln w="38100">
+            <a:prstDash val="sysDot"/>
+            <a:tailEnd type="arrow"/>
+          </a:ln>
+        </p:spPr>
+        <p:style>
+          <a:lnRef idx="2">
+            <a:schemeClr val="dk1"/>
+          </a:lnRef>
+          <a:fillRef idx="0">
+            <a:schemeClr val="dk1"/>
+          </a:fillRef>
+          <a:effectRef idx="1">
+            <a:schemeClr val="dk1"/>
+          </a:effectRef>
+          <a:fontRef idx="minor">
+            <a:schemeClr val="tx1"/>
+          </a:fontRef>
+        </p:style>
+      </p:cxnSp>
+      <p:sp>
+        <p:nvSpPr>
+          <p:cNvPr id="147" name="Rounded Rectangle 146">
+            <a:extLst>
+              <a:ext uri="{FF2B5EF4-FFF2-40B4-BE49-F238E27FC236}">
+                <a16:creationId xmlns:a16="http://schemas.microsoft.com/office/drawing/2014/main" id="{93769D10-D74F-92CB-8A45-FEE9BD763552}"/>
+              </a:ext>
+            </a:extLst>
+          </p:cNvPr>
+          <p:cNvSpPr/>
+          <p:nvPr/>
+        </p:nvSpPr>
+        <p:spPr>
+          <a:xfrm>
+            <a:off x="22724206" y="7814635"/>
+            <a:ext cx="3469995" cy="713762"/>
+          </a:xfrm>
+          <a:prstGeom prst="roundRect">
+            <a:avLst/>
+          </a:prstGeom>
+          <a:noFill/>
+          <a:ln>
+            <a:solidFill>
+              <a:schemeClr val="accent1">
+                <a:lumMod val="75000"/>
+              </a:schemeClr>
+            </a:solidFill>
+          </a:ln>
+        </p:spPr>
+        <p:style>
+          <a:lnRef idx="2">
+            <a:schemeClr val="accent1">
+              <a:shade val="15000"/>
+            </a:schemeClr>
+          </a:lnRef>
+          <a:fillRef idx="1">
+            <a:schemeClr val="accent1"/>
+          </a:fillRef>
+          <a:effectRef idx="0">
+            <a:schemeClr val="accent1"/>
+          </a:effectRef>
+          <a:fontRef idx="minor">
+            <a:schemeClr val="lt1"/>
+          </a:fontRef>
+        </p:style>
+        <p:txBody>
+          <a:bodyPr rtlCol="0" anchor="ctr"/>
+          <a:lstStyle/>
+          <a:p>
+            <a:pPr algn="ctr"/>
+            <a:r>
+              <a:rPr lang="en-US" sz="2400" dirty="0">
+                <a:solidFill>
+                  <a:schemeClr val="tx1"/>
+                </a:solidFill>
+              </a:rPr>
+              <a:t>Analyze Content Header</a:t>
+            </a:r>
+          </a:p>
+        </p:txBody>
+      </p:sp>
+      <p:sp>
+        <p:nvSpPr>
+          <p:cNvPr id="148" name="Rounded Rectangle 147">
+            <a:extLst>
+              <a:ext uri="{FF2B5EF4-FFF2-40B4-BE49-F238E27FC236}">
+                <a16:creationId xmlns:a16="http://schemas.microsoft.com/office/drawing/2014/main" id="{1288E27D-D02F-3A27-1B39-17C2EE574745}"/>
+              </a:ext>
+            </a:extLst>
+          </p:cNvPr>
+          <p:cNvSpPr/>
+          <p:nvPr/>
+        </p:nvSpPr>
+        <p:spPr>
+          <a:xfrm>
+            <a:off x="20793087" y="10200178"/>
+            <a:ext cx="2960960" cy="942179"/>
+          </a:xfrm>
+          <a:prstGeom prst="roundRect">
+            <a:avLst/>
+          </a:prstGeom>
+          <a:noFill/>
+          <a:ln>
+            <a:solidFill>
+              <a:schemeClr val="accent1">
+                <a:lumMod val="75000"/>
+              </a:schemeClr>
+            </a:solidFill>
+          </a:ln>
+        </p:spPr>
+        <p:style>
+          <a:lnRef idx="2">
+            <a:schemeClr val="accent1">
+              <a:shade val="15000"/>
+            </a:schemeClr>
+          </a:lnRef>
+          <a:fillRef idx="1">
+            <a:schemeClr val="accent1"/>
+          </a:fillRef>
+          <a:effectRef idx="0">
+            <a:schemeClr val="accent1"/>
+          </a:effectRef>
+          <a:fontRef idx="minor">
+            <a:schemeClr val="lt1"/>
+          </a:fontRef>
+        </p:style>
+        <p:txBody>
+          <a:bodyPr rtlCol="0" anchor="ctr"/>
+          <a:lstStyle/>
+          <a:p>
+            <a:pPr algn="ctr"/>
+            <a:r>
+              <a:rPr lang="en-US" sz="2400" dirty="0">
+                <a:solidFill>
+                  <a:schemeClr val="tx1"/>
+                </a:solidFill>
+              </a:rPr>
+              <a:t>Gather Context from Literature</a:t>
+            </a:r>
+          </a:p>
+        </p:txBody>
+      </p:sp>
+      <p:cxnSp>
+        <p:nvCxnSpPr>
+          <p:cNvPr id="149" name="Elbow Connector 72">
+            <a:extLst>
+              <a:ext uri="{FF2B5EF4-FFF2-40B4-BE49-F238E27FC236}">
+                <a16:creationId xmlns:a16="http://schemas.microsoft.com/office/drawing/2014/main" id="{89CA9B41-FF4D-7D55-D071-3530267770FC}"/>
+              </a:ext>
+            </a:extLst>
+          </p:cNvPr>
+          <p:cNvCxnSpPr>
+            <a:cxnSpLocks/>
+            <a:stCxn id="147" idx="1"/>
+            <a:endCxn id="151" idx="0"/>
+          </p:cNvCxnSpPr>
+          <p:nvPr/>
+        </p:nvCxnSpPr>
+        <p:spPr>
+          <a:xfrm rot="10800000" flipV="1">
+            <a:off x="22273566" y="8171516"/>
+            <a:ext cx="450640" cy="914002"/>
+          </a:xfrm>
+          <a:prstGeom prst="bentConnector2">
+            <a:avLst/>
+          </a:prstGeom>
+          <a:ln w="38100">
+            <a:prstDash val="sysDot"/>
+            <a:tailEnd type="arrow"/>
+          </a:ln>
+        </p:spPr>
+        <p:style>
+          <a:lnRef idx="2">
+            <a:schemeClr val="dk1"/>
+          </a:lnRef>
+          <a:fillRef idx="0">
+            <a:schemeClr val="dk1"/>
+          </a:fillRef>
+          <a:effectRef idx="1">
+            <a:schemeClr val="dk1"/>
+          </a:effectRef>
+          <a:fontRef idx="minor">
+            <a:schemeClr val="tx1"/>
+          </a:fontRef>
+        </p:style>
+      </p:cxnSp>
+      <p:cxnSp>
+        <p:nvCxnSpPr>
+          <p:cNvPr id="150" name="Elbow Connector 72">
+            <a:extLst>
+              <a:ext uri="{FF2B5EF4-FFF2-40B4-BE49-F238E27FC236}">
+                <a16:creationId xmlns:a16="http://schemas.microsoft.com/office/drawing/2014/main" id="{EAE2EC3F-F0B7-A7A7-B26C-49CD4EA62C8C}"/>
+              </a:ext>
+            </a:extLst>
+          </p:cNvPr>
+          <p:cNvCxnSpPr>
+            <a:cxnSpLocks/>
+            <a:stCxn id="148" idx="2"/>
+            <a:endCxn id="138" idx="1"/>
+          </p:cNvCxnSpPr>
+          <p:nvPr/>
+        </p:nvCxnSpPr>
+        <p:spPr>
+          <a:xfrm rot="16200000" flipH="1">
+            <a:off x="22236278" y="11179646"/>
+            <a:ext cx="735130" cy="660552"/>
+          </a:xfrm>
+          <a:prstGeom prst="bentConnector2">
+            <a:avLst/>
+          </a:prstGeom>
+          <a:ln w="38100">
+            <a:prstDash val="sysDot"/>
+            <a:tailEnd type="arrow"/>
+          </a:ln>
+        </p:spPr>
+        <p:style>
+          <a:lnRef idx="2">
+            <a:schemeClr val="dk1"/>
+          </a:lnRef>
+          <a:fillRef idx="0">
+            <a:schemeClr val="dk1"/>
+          </a:fillRef>
+          <a:effectRef idx="1">
+            <a:schemeClr val="dk1"/>
+          </a:effectRef>
+          <a:fontRef idx="minor">
+            <a:schemeClr val="tx1"/>
+          </a:fontRef>
+        </p:style>
+      </p:cxnSp>
+      <p:sp>
+        <p:nvSpPr>
+          <p:cNvPr id="151" name="Rounded Rectangle 150">
+            <a:extLst>
+              <a:ext uri="{FF2B5EF4-FFF2-40B4-BE49-F238E27FC236}">
+                <a16:creationId xmlns:a16="http://schemas.microsoft.com/office/drawing/2014/main" id="{A9845CE9-41AA-7FFE-6CF8-CA8B810F4672}"/>
+              </a:ext>
+            </a:extLst>
+          </p:cNvPr>
+          <p:cNvSpPr/>
+          <p:nvPr/>
+        </p:nvSpPr>
+        <p:spPr>
+          <a:xfrm>
+            <a:off x="20538568" y="9085518"/>
+            <a:ext cx="3469995" cy="713762"/>
+          </a:xfrm>
+          <a:prstGeom prst="roundRect">
+            <a:avLst/>
+          </a:prstGeom>
+          <a:noFill/>
+          <a:ln>
+            <a:solidFill>
+              <a:schemeClr val="accent1">
+                <a:lumMod val="75000"/>
+              </a:schemeClr>
+            </a:solidFill>
+          </a:ln>
+        </p:spPr>
+        <p:style>
+          <a:lnRef idx="2">
+            <a:schemeClr val="accent1">
+              <a:shade val="15000"/>
+            </a:schemeClr>
+          </a:lnRef>
+          <a:fillRef idx="1">
+            <a:schemeClr val="accent1"/>
+          </a:fillRef>
+          <a:effectRef idx="0">
+            <a:schemeClr val="accent1"/>
+          </a:effectRef>
+          <a:fontRef idx="minor">
+            <a:schemeClr val="lt1"/>
+          </a:fontRef>
+        </p:style>
+        <p:txBody>
+          <a:bodyPr rtlCol="0" anchor="ctr"/>
+          <a:lstStyle/>
+          <a:p>
+            <a:pPr algn="ctr"/>
+            <a:r>
+              <a:rPr lang="en-US" sz="2400" dirty="0">
+                <a:solidFill>
+                  <a:schemeClr val="tx1"/>
+                </a:solidFill>
+              </a:rPr>
+              <a:t>Add Literature</a:t>
+            </a:r>
+          </a:p>
+        </p:txBody>
+      </p:sp>
+      <p:cxnSp>
+        <p:nvCxnSpPr>
+          <p:cNvPr id="152" name="Elbow Connector 72">
+            <a:extLst>
+              <a:ext uri="{FF2B5EF4-FFF2-40B4-BE49-F238E27FC236}">
+                <a16:creationId xmlns:a16="http://schemas.microsoft.com/office/drawing/2014/main" id="{464D74EE-0D69-A6FD-936B-CE5668AE2D8F}"/>
+              </a:ext>
+            </a:extLst>
+          </p:cNvPr>
+          <p:cNvCxnSpPr>
+            <a:cxnSpLocks/>
+            <a:stCxn id="151" idx="2"/>
+            <a:endCxn id="148" idx="0"/>
+          </p:cNvCxnSpPr>
+          <p:nvPr/>
+        </p:nvCxnSpPr>
+        <p:spPr>
+          <a:xfrm>
+            <a:off x="22273566" y="9799280"/>
+            <a:ext cx="1" cy="400898"/>
+          </a:xfrm>
+          <a:prstGeom prst="straightConnector1">
+            <a:avLst/>
+          </a:prstGeom>
+          <a:ln w="38100">
+            <a:prstDash val="sysDot"/>
+            <a:tailEnd type="arrow"/>
+          </a:ln>
+        </p:spPr>
+        <p:style>
+          <a:lnRef idx="2">
+            <a:schemeClr val="dk1"/>
+          </a:lnRef>
+          <a:fillRef idx="0">
+            <a:schemeClr val="dk1"/>
+          </a:fillRef>
+          <a:effectRef idx="1">
+            <a:schemeClr val="dk1"/>
+          </a:effectRef>
+          <a:fontRef idx="minor">
+            <a:schemeClr val="tx1"/>
+          </a:fontRef>
+        </p:style>
+      </p:cxnSp>
+      <p:sp>
+        <p:nvSpPr>
+          <p:cNvPr id="155" name="Rounded Rectangle 154">
+            <a:extLst>
+              <a:ext uri="{FF2B5EF4-FFF2-40B4-BE49-F238E27FC236}">
+                <a16:creationId xmlns:a16="http://schemas.microsoft.com/office/drawing/2014/main" id="{12463C29-A64E-EAC7-0EF8-872A493ED018}"/>
+              </a:ext>
+            </a:extLst>
+          </p:cNvPr>
+          <p:cNvSpPr/>
+          <p:nvPr/>
+        </p:nvSpPr>
+        <p:spPr>
+          <a:xfrm>
+            <a:off x="24670102" y="10313535"/>
+            <a:ext cx="3789640" cy="713763"/>
+          </a:xfrm>
+          <a:prstGeom prst="roundRect">
+            <a:avLst/>
+          </a:prstGeom>
+          <a:noFill/>
+          <a:ln>
+            <a:solidFill>
+              <a:schemeClr val="accent1">
+                <a:lumMod val="75000"/>
+              </a:schemeClr>
+            </a:solidFill>
+          </a:ln>
+        </p:spPr>
+        <p:style>
+          <a:lnRef idx="2">
+            <a:schemeClr val="accent1">
+              <a:shade val="15000"/>
+            </a:schemeClr>
+          </a:lnRef>
+          <a:fillRef idx="1">
+            <a:schemeClr val="accent1"/>
+          </a:fillRef>
+          <a:effectRef idx="0">
+            <a:schemeClr val="accent1"/>
+          </a:effectRef>
+          <a:fontRef idx="minor">
+            <a:schemeClr val="lt1"/>
+          </a:fontRef>
+        </p:style>
+        <p:txBody>
+          <a:bodyPr rtlCol="0" anchor="ctr"/>
+          <a:lstStyle/>
+          <a:p>
+            <a:pPr algn="ctr"/>
+            <a:r>
+              <a:rPr lang="en-US" sz="2400" dirty="0">
+                <a:solidFill>
+                  <a:schemeClr val="tx1"/>
+                </a:solidFill>
+              </a:rPr>
+              <a:t>Wait for the Other Branch</a:t>
+            </a:r>
+          </a:p>
+        </p:txBody>
+      </p:sp>
+      <p:cxnSp>
+        <p:nvCxnSpPr>
+          <p:cNvPr id="156" name="Elbow Connector 72">
+            <a:extLst>
+              <a:ext uri="{FF2B5EF4-FFF2-40B4-BE49-F238E27FC236}">
+                <a16:creationId xmlns:a16="http://schemas.microsoft.com/office/drawing/2014/main" id="{C4F8F8EA-ABCF-09EE-2FBF-3DF7896D36A3}"/>
+              </a:ext>
+            </a:extLst>
+          </p:cNvPr>
+          <p:cNvCxnSpPr>
+            <a:cxnSpLocks/>
+            <a:stCxn id="147" idx="3"/>
+            <a:endCxn id="158" idx="0"/>
+          </p:cNvCxnSpPr>
+          <p:nvPr/>
+        </p:nvCxnSpPr>
+        <p:spPr>
+          <a:xfrm>
+            <a:off x="26194201" y="8171516"/>
+            <a:ext cx="371673" cy="798778"/>
+          </a:xfrm>
+          <a:prstGeom prst="bentConnector2">
+            <a:avLst/>
+          </a:prstGeom>
+          <a:ln w="38100">
+            <a:prstDash val="sysDot"/>
+            <a:tailEnd type="arrow"/>
+          </a:ln>
+        </p:spPr>
+        <p:style>
+          <a:lnRef idx="2">
+            <a:schemeClr val="dk1"/>
+          </a:lnRef>
+          <a:fillRef idx="0">
+            <a:schemeClr val="dk1"/>
+          </a:fillRef>
+          <a:effectRef idx="1">
+            <a:schemeClr val="dk1"/>
+          </a:effectRef>
+          <a:fontRef idx="minor">
+            <a:schemeClr val="tx1"/>
+          </a:fontRef>
+        </p:style>
+      </p:cxnSp>
+      <p:cxnSp>
+        <p:nvCxnSpPr>
+          <p:cNvPr id="157" name="Elbow Connector 72">
+            <a:extLst>
+              <a:ext uri="{FF2B5EF4-FFF2-40B4-BE49-F238E27FC236}">
+                <a16:creationId xmlns:a16="http://schemas.microsoft.com/office/drawing/2014/main" id="{70D41B3D-3A05-1617-6A95-D7413EC62EB1}"/>
+              </a:ext>
+            </a:extLst>
+          </p:cNvPr>
+          <p:cNvCxnSpPr>
+            <a:cxnSpLocks/>
+            <a:stCxn id="155" idx="2"/>
+            <a:endCxn id="138" idx="3"/>
+          </p:cNvCxnSpPr>
+          <p:nvPr/>
+        </p:nvCxnSpPr>
+        <p:spPr>
+          <a:xfrm rot="5400000">
+            <a:off x="25804907" y="11117471"/>
+            <a:ext cx="850189" cy="669843"/>
+          </a:xfrm>
+          <a:prstGeom prst="bentConnector2">
+            <a:avLst/>
+          </a:prstGeom>
+          <a:ln w="38100">
+            <a:prstDash val="sysDot"/>
+            <a:tailEnd type="arrow"/>
+          </a:ln>
+        </p:spPr>
+        <p:style>
+          <a:lnRef idx="2">
+            <a:schemeClr val="dk1"/>
+          </a:lnRef>
+          <a:fillRef idx="0">
+            <a:schemeClr val="dk1"/>
+          </a:fillRef>
+          <a:effectRef idx="1">
+            <a:schemeClr val="dk1"/>
+          </a:effectRef>
+          <a:fontRef idx="minor">
+            <a:schemeClr val="tx1"/>
+          </a:fontRef>
+        </p:style>
+      </p:cxnSp>
+      <p:sp>
+        <p:nvSpPr>
+          <p:cNvPr id="158" name="Rounded Rectangle 157">
+            <a:extLst>
+              <a:ext uri="{FF2B5EF4-FFF2-40B4-BE49-F238E27FC236}">
+                <a16:creationId xmlns:a16="http://schemas.microsoft.com/office/drawing/2014/main" id="{F9794A96-55FA-AFC6-B7D4-B1C5A3C9797D}"/>
+              </a:ext>
+            </a:extLst>
+          </p:cNvPr>
+          <p:cNvSpPr/>
+          <p:nvPr/>
+        </p:nvSpPr>
+        <p:spPr>
+          <a:xfrm>
+            <a:off x="25084546" y="8970294"/>
+            <a:ext cx="2962656" cy="941832"/>
+          </a:xfrm>
+          <a:prstGeom prst="roundRect">
+            <a:avLst/>
+          </a:prstGeom>
+          <a:noFill/>
+          <a:ln>
+            <a:solidFill>
+              <a:schemeClr val="accent1">
+                <a:lumMod val="75000"/>
+              </a:schemeClr>
+            </a:solidFill>
+          </a:ln>
+        </p:spPr>
+        <p:style>
+          <a:lnRef idx="2">
+            <a:schemeClr val="accent1">
+              <a:shade val="15000"/>
+            </a:schemeClr>
+          </a:lnRef>
+          <a:fillRef idx="1">
+            <a:schemeClr val="accent1"/>
+          </a:fillRef>
+          <a:effectRef idx="0">
+            <a:schemeClr val="accent1"/>
+          </a:effectRef>
+          <a:fontRef idx="minor">
+            <a:schemeClr val="lt1"/>
+          </a:fontRef>
+        </p:style>
+        <p:txBody>
+          <a:bodyPr rtlCol="0" anchor="ctr"/>
+          <a:lstStyle/>
+          <a:p>
+            <a:pPr algn="ctr"/>
+            <a:r>
+              <a:rPr lang="en-US" sz="2400" dirty="0">
+                <a:solidFill>
+                  <a:schemeClr val="tx1"/>
+                </a:solidFill>
+              </a:rPr>
+              <a:t>Gather Context from Documents</a:t>
+            </a:r>
+          </a:p>
+        </p:txBody>
+      </p:sp>
+      <p:cxnSp>
+        <p:nvCxnSpPr>
+          <p:cNvPr id="159" name="Elbow Connector 72">
+            <a:extLst>
+              <a:ext uri="{FF2B5EF4-FFF2-40B4-BE49-F238E27FC236}">
+                <a16:creationId xmlns:a16="http://schemas.microsoft.com/office/drawing/2014/main" id="{4DD26CCB-B1DA-D5AD-62FE-5457F2E2752E}"/>
+              </a:ext>
+            </a:extLst>
+          </p:cNvPr>
+          <p:cNvCxnSpPr>
+            <a:cxnSpLocks/>
+            <a:stCxn id="158" idx="2"/>
+            <a:endCxn id="155" idx="0"/>
+          </p:cNvCxnSpPr>
+          <p:nvPr/>
+        </p:nvCxnSpPr>
+        <p:spPr>
+          <a:xfrm flipH="1">
+            <a:off x="26564922" y="9912126"/>
+            <a:ext cx="952" cy="401409"/>
+          </a:xfrm>
+          <a:prstGeom prst="straightConnector1">
+            <a:avLst/>
+          </a:prstGeom>
+          <a:ln w="38100">
+            <a:prstDash val="sysDot"/>
+            <a:tailEnd type="arrow"/>
+          </a:ln>
+        </p:spPr>
+        <p:style>
+          <a:lnRef idx="2">
+            <a:schemeClr val="dk1"/>
+          </a:lnRef>
+          <a:fillRef idx="0">
+            <a:schemeClr val="dk1"/>
+          </a:fillRef>
+          <a:effectRef idx="1">
+            <a:schemeClr val="dk1"/>
+          </a:effectRef>
+          <a:fontRef idx="minor">
+            <a:schemeClr val="tx1"/>
+          </a:fontRef>
+        </p:style>
+      </p:cxnSp>
     </p:spTree>
     <p:extLst>
       <p:ext uri="{BB962C8B-B14F-4D97-AF65-F5344CB8AC3E}">
-        <p14:creationId xmlns:p14="http://schemas.microsoft.com/office/powerpoint/2010/main" val="2657172784"/>
+        <p14:creationId xmlns:p14="http://schemas.microsoft.com/office/powerpoint/2010/main" val="4183645857"/>
       </p:ext>
     </p:extLst>
   </p:cSld>
@@ -5218,6 +8568,278 @@
 </file>
 
 <file path=ppt/slides/slide4.xml><?xml version="1.0" encoding="utf-8"?>
+<p:sld xmlns:a="http://schemas.openxmlformats.org/drawingml/2006/main" xmlns:r="http://schemas.openxmlformats.org/officeDocument/2006/relationships" xmlns:p="http://schemas.openxmlformats.org/presentationml/2006/main">
+  <p:cSld>
+    <p:spTree>
+      <p:nvGrpSpPr>
+        <p:cNvPr id="1" name=""/>
+        <p:cNvGrpSpPr/>
+        <p:nvPr/>
+      </p:nvGrpSpPr>
+      <p:grpSpPr>
+        <a:xfrm>
+          <a:off x="0" y="0"/>
+          <a:ext cx="0" cy="0"/>
+          <a:chOff x="0" y="0"/>
+          <a:chExt cx="0" cy="0"/>
+        </a:xfrm>
+      </p:grpSpPr>
+      <p:pic>
+        <p:nvPicPr>
+          <p:cNvPr id="4" name="Picture 3">
+            <a:extLst>
+              <a:ext uri="{FF2B5EF4-FFF2-40B4-BE49-F238E27FC236}">
+                <a16:creationId xmlns:a16="http://schemas.microsoft.com/office/drawing/2014/main" id="{9EFB9DFE-1B12-7764-17C4-1D5D2B792491}"/>
+              </a:ext>
+            </a:extLst>
+          </p:cNvPr>
+          <p:cNvPicPr>
+            <a:picLocks noChangeAspect="1"/>
+          </p:cNvPicPr>
+          <p:nvPr/>
+        </p:nvPicPr>
+        <p:blipFill>
+          <a:blip r:embed="rId2"/>
+          <a:stretch>
+            <a:fillRect/>
+          </a:stretch>
+        </p:blipFill>
+        <p:spPr>
+          <a:xfrm>
+            <a:off x="0" y="1356852"/>
+            <a:ext cx="29260800" cy="14848579"/>
+          </a:xfrm>
+          <a:prstGeom prst="rect">
+            <a:avLst/>
+          </a:prstGeom>
+        </p:spPr>
+      </p:pic>
+    </p:spTree>
+    <p:extLst>
+      <p:ext uri="{BB962C8B-B14F-4D97-AF65-F5344CB8AC3E}">
+        <p14:creationId xmlns:p14="http://schemas.microsoft.com/office/powerpoint/2010/main" val="183231347"/>
+      </p:ext>
+    </p:extLst>
+  </p:cSld>
+  <p:clrMapOvr>
+    <a:masterClrMapping/>
+  </p:clrMapOvr>
+</p:sld>
+</file>
+
+<file path=ppt/slides/slide5.xml><?xml version="1.0" encoding="utf-8"?>
+<p:sld xmlns:a="http://schemas.openxmlformats.org/drawingml/2006/main" xmlns:r="http://schemas.openxmlformats.org/officeDocument/2006/relationships" xmlns:p="http://schemas.openxmlformats.org/presentationml/2006/main">
+  <p:cSld>
+    <p:spTree>
+      <p:nvGrpSpPr>
+        <p:cNvPr id="1" name=""/>
+        <p:cNvGrpSpPr/>
+        <p:nvPr/>
+      </p:nvGrpSpPr>
+      <p:grpSpPr>
+        <a:xfrm>
+          <a:off x="0" y="0"/>
+          <a:ext cx="0" cy="0"/>
+          <a:chOff x="0" y="0"/>
+          <a:chExt cx="0" cy="0"/>
+        </a:xfrm>
+      </p:grpSpPr>
+      <p:pic>
+        <p:nvPicPr>
+          <p:cNvPr id="4" name="Picture 3">
+            <a:extLst>
+              <a:ext uri="{FF2B5EF4-FFF2-40B4-BE49-F238E27FC236}">
+                <a16:creationId xmlns:a16="http://schemas.microsoft.com/office/drawing/2014/main" id="{DB904332-B6F0-6F0B-0B0F-C249ECC4D5DA}"/>
+              </a:ext>
+            </a:extLst>
+          </p:cNvPr>
+          <p:cNvPicPr>
+            <a:picLocks noChangeAspect="1"/>
+          </p:cNvPicPr>
+          <p:nvPr/>
+        </p:nvPicPr>
+        <p:blipFill>
+          <a:blip r:embed="rId2"/>
+          <a:stretch>
+            <a:fillRect/>
+          </a:stretch>
+        </p:blipFill>
+        <p:spPr>
+          <a:xfrm>
+            <a:off x="2001643" y="1765128"/>
+            <a:ext cx="12399733" cy="9809838"/>
+          </a:xfrm>
+          <a:prstGeom prst="rect">
+            <a:avLst/>
+          </a:prstGeom>
+        </p:spPr>
+      </p:pic>
+      <p:pic>
+        <p:nvPicPr>
+          <p:cNvPr id="5" name="Picture 4">
+            <a:extLst>
+              <a:ext uri="{FF2B5EF4-FFF2-40B4-BE49-F238E27FC236}">
+                <a16:creationId xmlns:a16="http://schemas.microsoft.com/office/drawing/2014/main" id="{7FA24887-3880-7A30-D14F-C203EF3F67BA}"/>
+              </a:ext>
+            </a:extLst>
+          </p:cNvPr>
+          <p:cNvPicPr>
+            <a:picLocks noChangeAspect="1"/>
+          </p:cNvPicPr>
+          <p:nvPr/>
+        </p:nvPicPr>
+        <p:blipFill>
+          <a:blip r:embed="rId3"/>
+          <a:stretch>
+            <a:fillRect/>
+          </a:stretch>
+        </p:blipFill>
+        <p:spPr>
+          <a:xfrm>
+            <a:off x="14401375" y="1765128"/>
+            <a:ext cx="12399733" cy="9809838"/>
+          </a:xfrm>
+          <a:prstGeom prst="rect">
+            <a:avLst/>
+          </a:prstGeom>
+        </p:spPr>
+      </p:pic>
+      <p:sp>
+        <p:nvSpPr>
+          <p:cNvPr id="6" name="TextBox 5">
+            <a:extLst>
+              <a:ext uri="{FF2B5EF4-FFF2-40B4-BE49-F238E27FC236}">
+                <a16:creationId xmlns:a16="http://schemas.microsoft.com/office/drawing/2014/main" id="{274BC040-8A45-028A-6FFD-95406F80CB1F}"/>
+              </a:ext>
+            </a:extLst>
+          </p:cNvPr>
+          <p:cNvSpPr txBox="1"/>
+          <p:nvPr/>
+        </p:nvSpPr>
+        <p:spPr>
+          <a:xfrm>
+            <a:off x="6425413" y="1103964"/>
+            <a:ext cx="3552191" cy="584775"/>
+          </a:xfrm>
+          <a:prstGeom prst="rect">
+            <a:avLst/>
+          </a:prstGeom>
+          <a:noFill/>
+        </p:spPr>
+        <p:txBody>
+          <a:bodyPr wrap="none" rtlCol="0">
+            <a:spAutoFit/>
+          </a:bodyPr>
+          <a:lstStyle/>
+          <a:p>
+            <a:r>
+              <a:rPr lang="en-US" sz="3200" dirty="0"/>
+              <a:t>Concept Map (Full)</a:t>
+            </a:r>
+          </a:p>
+        </p:txBody>
+      </p:sp>
+      <p:sp>
+        <p:nvSpPr>
+          <p:cNvPr id="7" name="TextBox 6">
+            <a:extLst>
+              <a:ext uri="{FF2B5EF4-FFF2-40B4-BE49-F238E27FC236}">
+                <a16:creationId xmlns:a16="http://schemas.microsoft.com/office/drawing/2014/main" id="{18287BCA-6980-8351-E461-3BECBD4449DA}"/>
+              </a:ext>
+            </a:extLst>
+          </p:cNvPr>
+          <p:cNvSpPr txBox="1"/>
+          <p:nvPr/>
+        </p:nvSpPr>
+        <p:spPr>
+          <a:xfrm>
+            <a:off x="17434861" y="1103964"/>
+            <a:ext cx="6332759" cy="584775"/>
+          </a:xfrm>
+          <a:prstGeom prst="rect">
+            <a:avLst/>
+          </a:prstGeom>
+          <a:noFill/>
+        </p:spPr>
+        <p:txBody>
+          <a:bodyPr wrap="none" rtlCol="0">
+            <a:spAutoFit/>
+          </a:bodyPr>
+          <a:lstStyle/>
+          <a:p>
+            <a:r>
+              <a:rPr lang="en-US" sz="3200" dirty="0"/>
+              <a:t>Concept Map (Partial and Zoomed)</a:t>
+            </a:r>
+          </a:p>
+        </p:txBody>
+      </p:sp>
+      <p:sp>
+        <p:nvSpPr>
+          <p:cNvPr id="8" name="Rectangle 7">
+            <a:extLst>
+              <a:ext uri="{FF2B5EF4-FFF2-40B4-BE49-F238E27FC236}">
+                <a16:creationId xmlns:a16="http://schemas.microsoft.com/office/drawing/2014/main" id="{1F18290A-CDE0-3790-AAEF-58B7633DABB9}"/>
+              </a:ext>
+            </a:extLst>
+          </p:cNvPr>
+          <p:cNvSpPr/>
+          <p:nvPr/>
+        </p:nvSpPr>
+        <p:spPr>
+          <a:xfrm>
+            <a:off x="1828800" y="825190"/>
+            <a:ext cx="25224059" cy="10950498"/>
+          </a:xfrm>
+          <a:prstGeom prst="rect">
+            <a:avLst/>
+          </a:prstGeom>
+          <a:noFill/>
+          <a:ln>
+            <a:solidFill>
+              <a:schemeClr val="tx1"/>
+            </a:solidFill>
+          </a:ln>
+        </p:spPr>
+        <p:style>
+          <a:lnRef idx="2">
+            <a:schemeClr val="accent1">
+              <a:shade val="15000"/>
+            </a:schemeClr>
+          </a:lnRef>
+          <a:fillRef idx="1">
+            <a:schemeClr val="accent1"/>
+          </a:fillRef>
+          <a:effectRef idx="0">
+            <a:schemeClr val="accent1"/>
+          </a:effectRef>
+          <a:fontRef idx="minor">
+            <a:schemeClr val="lt1"/>
+          </a:fontRef>
+        </p:style>
+        <p:txBody>
+          <a:bodyPr rtlCol="0" anchor="ctr"/>
+          <a:lstStyle/>
+          <a:p>
+            <a:pPr algn="ctr"/>
+            <a:endParaRPr lang="en-US"/>
+          </a:p>
+        </p:txBody>
+      </p:sp>
+    </p:spTree>
+    <p:extLst>
+      <p:ext uri="{BB962C8B-B14F-4D97-AF65-F5344CB8AC3E}">
+        <p14:creationId xmlns:p14="http://schemas.microsoft.com/office/powerpoint/2010/main" val="1775056810"/>
+      </p:ext>
+    </p:extLst>
+  </p:cSld>
+  <p:clrMapOvr>
+    <a:masterClrMapping/>
+  </p:clrMapOvr>
+</p:sld>
+</file>
+
+<file path=ppt/slides/slide6.xml><?xml version="1.0" encoding="utf-8"?>
 <p:sld xmlns:a="http://schemas.openxmlformats.org/drawingml/2006/main" xmlns:r="http://schemas.openxmlformats.org/officeDocument/2006/relationships" xmlns:p="http://schemas.openxmlformats.org/presentationml/2006/main">
   <p:cSld>
     <p:spTree>
@@ -8867,10 +12489,10 @@
           <p:nvPr/>
         </p:nvPicPr>
         <p:blipFill>
-          <a:blip r:embed="rId5">
+          <a:blip>
             <a:extLst>
               <a:ext uri="{96DAC541-7B7A-43D3-8B79-37D633B846F1}">
-                <asvg:svgBlip xmlns:asvg="http://schemas.microsoft.com/office/drawing/2016/SVG/main" r:embed="rId6"/>
+                <asvg:svgBlip xmlns:asvg="http://schemas.microsoft.com/office/drawing/2016/SVG/main" r:embed="rId5"/>
               </a:ext>
             </a:extLst>
           </a:blip>
@@ -8903,10 +12525,10 @@
           <p:nvPr/>
         </p:nvPicPr>
         <p:blipFill>
-          <a:blip r:embed="rId7">
+          <a:blip>
             <a:extLst>
               <a:ext uri="{96DAC541-7B7A-43D3-8B79-37D633B846F1}">
-                <asvg:svgBlip xmlns:asvg="http://schemas.microsoft.com/office/drawing/2016/SVG/main" r:embed="rId8"/>
+                <asvg:svgBlip xmlns:asvg="http://schemas.microsoft.com/office/drawing/2016/SVG/main" r:embed="rId6"/>
               </a:ext>
             </a:extLst>
           </a:blip>
@@ -8928,6 +12550,126 @@
     <p:extLst>
       <p:ext uri="{BB962C8B-B14F-4D97-AF65-F5344CB8AC3E}">
         <p14:creationId xmlns:p14="http://schemas.microsoft.com/office/powerpoint/2010/main" val="206403222"/>
+      </p:ext>
+    </p:extLst>
+  </p:cSld>
+  <p:clrMapOvr>
+    <a:masterClrMapping/>
+  </p:clrMapOvr>
+</p:sld>
+</file>
+
+<file path=ppt/slides/slide7.xml><?xml version="1.0" encoding="utf-8"?>
+<p:sld xmlns:a="http://schemas.openxmlformats.org/drawingml/2006/main" xmlns:r="http://schemas.openxmlformats.org/officeDocument/2006/relationships" xmlns:p="http://schemas.openxmlformats.org/presentationml/2006/main">
+  <p:cSld>
+    <p:spTree>
+      <p:nvGrpSpPr>
+        <p:cNvPr id="1" name=""/>
+        <p:cNvGrpSpPr/>
+        <p:nvPr/>
+      </p:nvGrpSpPr>
+      <p:grpSpPr>
+        <a:xfrm>
+          <a:off x="0" y="0"/>
+          <a:ext cx="0" cy="0"/>
+          <a:chOff x="0" y="0"/>
+          <a:chExt cx="0" cy="0"/>
+        </a:xfrm>
+      </p:grpSpPr>
+      <p:pic>
+        <p:nvPicPr>
+          <p:cNvPr id="2" name="Picture 1">
+            <a:extLst>
+              <a:ext uri="{FF2B5EF4-FFF2-40B4-BE49-F238E27FC236}">
+                <a16:creationId xmlns:a16="http://schemas.microsoft.com/office/drawing/2014/main" id="{9E99DDEB-CFF7-DA1B-DE02-B26D31E3AABD}"/>
+              </a:ext>
+            </a:extLst>
+          </p:cNvPr>
+          <p:cNvPicPr>
+            <a:picLocks noChangeAspect="1"/>
+          </p:cNvPicPr>
+          <p:nvPr/>
+        </p:nvPicPr>
+        <p:blipFill>
+          <a:blip r:embed="rId3"/>
+          <a:stretch>
+            <a:fillRect/>
+          </a:stretch>
+        </p:blipFill>
+        <p:spPr>
+          <a:xfrm>
+            <a:off x="7598747" y="0"/>
+            <a:ext cx="13716000" cy="6497662"/>
+          </a:xfrm>
+          <a:prstGeom prst="rect">
+            <a:avLst/>
+          </a:prstGeom>
+        </p:spPr>
+      </p:pic>
+      <p:pic>
+        <p:nvPicPr>
+          <p:cNvPr id="3" name="Picture 2">
+            <a:extLst>
+              <a:ext uri="{FF2B5EF4-FFF2-40B4-BE49-F238E27FC236}">
+                <a16:creationId xmlns:a16="http://schemas.microsoft.com/office/drawing/2014/main" id="{DC53E7BF-04B6-18D4-B8E1-CE5C3CAA1460}"/>
+              </a:ext>
+            </a:extLst>
+          </p:cNvPr>
+          <p:cNvPicPr>
+            <a:picLocks noChangeAspect="1"/>
+          </p:cNvPicPr>
+          <p:nvPr/>
+        </p:nvPicPr>
+        <p:blipFill>
+          <a:blip r:embed="rId4"/>
+          <a:stretch>
+            <a:fillRect/>
+          </a:stretch>
+        </p:blipFill>
+        <p:spPr>
+          <a:xfrm>
+            <a:off x="7598746" y="6717890"/>
+            <a:ext cx="13715999" cy="6358178"/>
+          </a:xfrm>
+          <a:prstGeom prst="rect">
+            <a:avLst/>
+          </a:prstGeom>
+        </p:spPr>
+      </p:pic>
+      <p:pic>
+        <p:nvPicPr>
+          <p:cNvPr id="4" name="Picture 3">
+            <a:extLst>
+              <a:ext uri="{FF2B5EF4-FFF2-40B4-BE49-F238E27FC236}">
+                <a16:creationId xmlns:a16="http://schemas.microsoft.com/office/drawing/2014/main" id="{B4652171-7574-3FD5-EE3E-8BD0C429BC01}"/>
+              </a:ext>
+            </a:extLst>
+          </p:cNvPr>
+          <p:cNvPicPr>
+            <a:picLocks noChangeAspect="1"/>
+          </p:cNvPicPr>
+          <p:nvPr/>
+        </p:nvPicPr>
+        <p:blipFill>
+          <a:blip r:embed="rId5"/>
+          <a:stretch>
+            <a:fillRect/>
+          </a:stretch>
+        </p:blipFill>
+        <p:spPr>
+          <a:xfrm>
+            <a:off x="7598746" y="13296296"/>
+            <a:ext cx="13715998" cy="6358178"/>
+          </a:xfrm>
+          <a:prstGeom prst="rect">
+            <a:avLst/>
+          </a:prstGeom>
+        </p:spPr>
+      </p:pic>
+    </p:spTree>
+    <p:extLst>
+      <p:ext uri="{BB962C8B-B14F-4D97-AF65-F5344CB8AC3E}">
+        <p14:creationId xmlns:p14="http://schemas.microsoft.com/office/powerpoint/2010/main" val="214516105"/>
       </p:ext>
     </p:extLst>
   </p:cSld>
